--- a/Development_D4/D4-L12_Review_and_Unit_Assessment_Environment_Weather_Technology.pptx
+++ b/Development_D4/D4-L12_Review_and_Unit_Assessment_Environment_Weather_Technology.pptx
@@ -625,7 +625,11 @@
           <a:lstStyle/>
           <a:p>
             <a:r>
-              <a:rPr lang="en-US" dirty="0"/>
+              <a:rPr lang="ar-SA" dirty="0">
+                <a:latin typeface="Amiri" pitchFamily="2" charset="-78"/>
+                <a:ea typeface="Amiri" pitchFamily="2" charset="-78"/>
+                <a:cs typeface="Amiri" pitchFamily="2" charset="-78"/>
+              </a:rPr>
               <a:t>LISTENING TEXT 1 · QUESTIONS 5–8 (website Part A, 20 marks: 20 questions × 1). Read the recording twice at natural pace (website: “each of the three recordings may be played twice”); students answer after the second reading.
 SCRIPT: يَسُودُ المَنَاخُ الصَّحْرَاوِيُّ الجَافُّ فِي دَاخِلِ بَعْضِ الدُّوَلِ العَرَبِيَّةِ، وَيُشَارُ إِلَى أَنَّ فَتَرَاتِ الجَفَافِ أَصْبَحَتْ أَطْوَلَ. وَنَتِيجَةً لِذٰلِكَ، يَزْدَادُ الضَّغْطُ عَلَى المِيَاهِ الجَوْفِيَّةِ. يَقْتَرِحُ الخَبِيرُ إِعَادَةَ اسْتِخْدَامِ المِيَاهِ وَتَرْشِيدَ الاسْتِهْلَاكِ.
 Private chat: 4 letters.</a:t>
@@ -803,7 +807,11 @@
           <a:lstStyle/>
           <a:p>
             <a:r>
-              <a:rPr lang="en-US" dirty="0"/>
+              <a:rPr lang="ar-SA" dirty="0">
+                <a:latin typeface="Amiri" pitchFamily="2" charset="-78"/>
+                <a:ea typeface="Amiri" pitchFamily="2" charset="-78"/>
+                <a:cs typeface="Amiri" pitchFamily="2" charset="-78"/>
+              </a:rPr>
               <a:t>LISTENING TEXT 2 · 6 QUESTIONS (website Part A, 20 marks: 20 questions × 1). Read the recording twice at natural pace (website: “each of the three recordings may be played twice”); students answer after the second reading.
 SCRIPT: سَلْمَى: أُؤَيِّدُ الطَّاقَةَ الشَّمْسِيَّةَ وَالشَّبَكَاتِ الذَّكِيَّةَ لِأَنَّهَا تُقَلِّلُ الهَدْرَ. عُمَرُ: أُوَافِقُ عَلَى تَقْلِيلِ الهَدْرِ، وَلٰكِنِّي أَخْشَى ارْتِفَاعَ التَّكْلِفَةِ وَجَمْعَ البَيَانَاتِ الشَّخْصِيَّةِ. سَلْمَى: إِذَنْ نَحْنُ مُتَّفِقَانِ عَلَى الهَدَفِ، وَلٰكِنَّنَا نَخْتَلِفُ فِي طَرِيقَةِ التَّطْبِيقِ.
 Private chat: 6 letters.</a:t>
@@ -981,7 +989,11 @@
           <a:lstStyle/>
           <a:p>
             <a:r>
-              <a:rPr lang="en-US" dirty="0"/>
+              <a:rPr lang="ar-SA" dirty="0">
+                <a:latin typeface="Amiri" pitchFamily="2" charset="-78"/>
+                <a:ea typeface="Amiri" pitchFamily="2" charset="-78"/>
+                <a:cs typeface="Amiri" pitchFamily="2" charset="-78"/>
+              </a:rPr>
               <a:t>LISTENING TEXT 3 · 6 QUESTIONS (website Part A, 20 marks: 20 questions × 1). Read the recording twice at natural pace (website: “each of the three recordings may be played twice”); students answer after the second reading.
 SCRIPT: تُمَثِّلُ الطَّاقَةُ المُتَجَدِّدَةُ خَمْسًا وَثَلَاثِينَ فِي المِئَةِ مِنْ إِنْتَاجِ الكَهْرَبَاءِ فِي المَدِينَةِ. وَكَانَ مِنَ المُقَرَّرِ اكْتِمَالُ شَبَكَةِ النَّقْلِ فِي عَامِ ٢٠٣٠، وَلٰكِنَّ المَوْعِدَ الجَدِيدَ هُوَ ٢٠٣٢. وَيُؤَكِّدُ الخَبِيرُ أَنَّ التِّقْنِيَّةَ وَحْدَهَا لَا تَكْفِي؛ بَلْ يَجِبُ أَنْ يَتَغَيَّرَ سُلُوكُ المُسْتَخْدِمِينَ أَيْضًا.
 Private chat: 6 letters.</a:t>
@@ -1511,7 +1523,11 @@
           <a:lstStyle/>
           <a:p>
             <a:r>
-              <a:rPr lang="en-US" dirty="0"/>
+              <a:rPr lang="ar-SA" dirty="0">
+                <a:latin typeface="Amiri" pitchFamily="2" charset="-78"/>
+                <a:ea typeface="Amiri" pitchFamily="2" charset="-78"/>
+                <a:cs typeface="Amiri" pitchFamily="2" charset="-78"/>
+              </a:rPr>
               <a:t>WELCOME (1 min) — while students join.
 • Greet each student by name as they arrive: السَّلَامُ عَلَيْكُمْ. Take the register (Pastoral Tracker: attendance 0/1).
 • 2-MINUTE CHECK-IN (SEND training): a private chat to any student who seemed unsettled last lesson — “Are you okay today? 👍 / 👎”.
@@ -1868,7 +1884,11 @@
           <a:lstStyle/>
           <a:p>
             <a:r>
-              <a:rPr lang="en-US" dirty="0"/>
+              <a:rPr lang="ar-SA" dirty="0">
+                <a:latin typeface="Amiri" pitchFamily="2" charset="-78"/>
+                <a:ea typeface="Amiri" pitchFamily="2" charset="-78"/>
+                <a:cs typeface="Amiri" pitchFamily="2" charset="-78"/>
+              </a:rPr>
               <a:t>SPEAKING (website, 10 marks). Teacher questions (D4-L11 prompts): مَا أَهَمُّ مُشْكِلَةٍ بِيئِيَّةٍ فِي رَأْيِكَ؟ · مَا أَسْبَابُهَا وَنَتَائِجُهَا؟ · مَا الحَلُّ الَّذِي تَقْتَرِحُهُ؟ · هَلِ التِّقْنِيَّةُ جُزْءٌ مِنَ الحَلِّ؟ · هَلْ هُنَاكَ حُدُودٌ لِهٰذَا الحَلِّ؟
 To a girl: رَأْيِكِ · تَقْتَرِحِينَهُ.
 Suggested marking: communication and development 4 · range 3 · accuracy and pronunciation 3. ORGANISATION: one-to-one while others finish writing, or trusted pairs with the teacher as interviewer.</a:t>
@@ -2584,7 +2604,11 @@
           <a:lstStyle/>
           <a:p>
             <a:r>
-              <a:rPr lang="en-US" dirty="0"/>
+              <a:rPr lang="ar-SA" dirty="0">
+                <a:latin typeface="Amiri" pitchFamily="2" charset="-78"/>
+                <a:ea typeface="Amiri" pitchFamily="2" charset="-78"/>
+                <a:cs typeface="Amiri" pitchFamily="2" charset="-78"/>
+              </a:rPr>
               <a:t>REVIEW (website “Cumulative grammar laboratory”, correct answers): يَتَّسِمُ السَّاحِلُ بِمَنَاخٍ مُعْتَدِلٍ · تَهُبُّ الرِّيَاحُ وَتَسْقُطُ الثُّلُوجُ · يُلَوَّثُ الهَوَاءُ بِعَوَادِمِ السَّيَّارَاتِ · يُؤَدِّي إِلَى · يَنْبَغِي أَنْ نُقَلِّلَ النُّفَايَاتِ · أَنْ يُعِيدُوا التَّدْوِيرَ · إِذَا لَمْ نُرَشِّدِ المِيَاهَ، فَسَتَزْدَادُ الأَزْمَةُ · يَنْضَبُ النِّفْطُ وَتَشِحُّ المِيَاهُ · يُشَارُ إِلَى أَنَّ المَنَاخَ يَتَغَيَّرُ · يُتَوَقَّعُ أَنْ يَزْدَادَ الطَّلَبُ · عَلَى الرَّغْمِ مِنْ أَنَّ المَشْرُوعَ مُكَلِّفٌ، فَإِنَّهُ يُوَفِّرُ الطَّاقَةَ لَاحِقًا · مُفِيدَةٌ إِلَى حَدٍّ مَا، شَرِيطَةَ أَنْ تُطَبَّقَ بِمَسْؤُولِيَّةٍ.
 (The website item 7 prints نُرَشِّدْ المِيَاهَ; before the article the sukūn becomes kasra: نُرَشِّدِ المِيَاهَ.)
 The website language vault (all D4 vocabulary by lesson) is for revision BEFORE the assessment — close it during each section.</a:t>
@@ -2762,7 +2786,11 @@
           <a:lstStyle/>
           <a:p>
             <a:r>
-              <a:rPr lang="en-US" dirty="0"/>
+              <a:rPr lang="ar-SA" dirty="0">
+                <a:latin typeface="Amiri" pitchFamily="2" charset="-78"/>
+                <a:ea typeface="Amiri" pitchFamily="2" charset="-78"/>
+                <a:cs typeface="Amiri" pitchFamily="2" charset="-78"/>
+              </a:rPr>
               <a:t>LISTENING TEXT 1 · QUESTIONS 1–4 (website Part A, 20 marks: 20 questions × 1). Read the recording twice at natural pace (website: “each of the three recordings may be played twice”); students answer after the second reading.
 SCRIPT: يَسُودُ المَنَاخُ الصَّحْرَاوِيُّ الجَافُّ فِي دَاخِلِ بَعْضِ الدُّوَلِ العَرَبِيَّةِ، وَيُشَارُ إِلَى أَنَّ فَتَرَاتِ الجَفَافِ أَصْبَحَتْ أَطْوَلَ. وَنَتِيجَةً لِذٰلِكَ، يَزْدَادُ الضَّغْطُ عَلَى المِيَاهِ الجَوْفِيَّةِ. يَقْتَرِحُ الخَبِيرُ إِعَادَةَ اسْتِخْدَامِ المِيَاهِ وَتَرْشِيدَ الاسْتِهْلَاكِ.
 Private chat: 4 letters.</a:t>
@@ -3336,6 +3364,7 @@
                   <a:srgbClr val="D4AF37"/>
                 </a:solidFill>
                 <a:latin typeface="Amiri" pitchFamily="2" charset="-78"/>
+                <a:ea typeface="Amiri" pitchFamily="2" charset="-78"/>
                 <a:cs typeface="Amiri" pitchFamily="2" charset="-78"/>
               </a:rPr>
               <a:t>م</a:t>
@@ -3542,6 +3571,7 @@
                   <a:srgbClr val="D4AF37"/>
                 </a:solidFill>
                 <a:latin typeface="Amiri" pitchFamily="2" charset="-78"/>
+                <a:ea typeface="Amiri" pitchFamily="2" charset="-78"/>
                 <a:cs typeface="Amiri" pitchFamily="2" charset="-78"/>
               </a:rPr>
               <a:t>المُرَاجَعَةُ وَتَقْيِيمُ الوَحْدَةِ</a:t>
@@ -3999,6 +4029,7 @@
                   <a:srgbClr val="D4AF37"/>
                 </a:solidFill>
                 <a:latin typeface="Amiri" pitchFamily="2" charset="-78"/>
+                <a:ea typeface="Amiri" pitchFamily="2" charset="-78"/>
                 <a:cs typeface="Amiri" pitchFamily="2" charset="-78"/>
               </a:rPr>
               <a:t>م</a:t>
@@ -4319,6 +4350,7 @@
                   <a:srgbClr val="8A6D1E"/>
                 </a:solidFill>
                 <a:latin typeface="Amiri" pitchFamily="2" charset="-78"/>
+                <a:ea typeface="Amiri" pitchFamily="2" charset="-78"/>
                 <a:cs typeface="Amiri" pitchFamily="2" charset="-78"/>
               </a:rPr>
               <a:t>الاِسْتِمَاعُ</a:t>
@@ -4593,6 +4625,7 @@
                   <a:srgbClr val="1F2A37"/>
                 </a:solidFill>
                 <a:latin typeface="Amiri" pitchFamily="2" charset="-78"/>
+                <a:ea typeface="Amiri" pitchFamily="2" charset="-78"/>
                 <a:cs typeface="Amiri" pitchFamily="2" charset="-78"/>
               </a:rPr>
               <a:t>يُشَارُ إِلَى أَنَّ</a:t>
@@ -4694,6 +4727,7 @@
                   <a:srgbClr val="1F2A37"/>
                 </a:solidFill>
                 <a:latin typeface="Amiri" pitchFamily="2" charset="-78"/>
+                <a:ea typeface="Amiri" pitchFamily="2" charset="-78"/>
                 <a:cs typeface="Amiri" pitchFamily="2" charset="-78"/>
               </a:rPr>
               <a:t>لِكَيْ</a:t>
@@ -4795,6 +4829,7 @@
                   <a:srgbClr val="1F2A37"/>
                 </a:solidFill>
                 <a:latin typeface="Amiri" pitchFamily="2" charset="-78"/>
+                <a:ea typeface="Amiri" pitchFamily="2" charset="-78"/>
                 <a:cs typeface="Amiri" pitchFamily="2" charset="-78"/>
               </a:rPr>
               <a:t>مِنْ نَاحِيَةٍ أُخْرَى</a:t>
@@ -6242,6 +6277,7 @@
                   <a:srgbClr val="D4AF37"/>
                 </a:solidFill>
                 <a:latin typeface="Amiri" pitchFamily="2" charset="-78"/>
+                <a:ea typeface="Amiri" pitchFamily="2" charset="-78"/>
                 <a:cs typeface="Amiri" pitchFamily="2" charset="-78"/>
               </a:rPr>
               <a:t>م</a:t>
@@ -6562,6 +6598,7 @@
                   <a:srgbClr val="8A6D1E"/>
                 </a:solidFill>
                 <a:latin typeface="Amiri" pitchFamily="2" charset="-78"/>
+                <a:ea typeface="Amiri" pitchFamily="2" charset="-78"/>
                 <a:cs typeface="Amiri" pitchFamily="2" charset="-78"/>
               </a:rPr>
               <a:t>الإِجَابَاتُ</a:t>
@@ -6863,6 +6900,7 @@
                   <a:srgbClr val="1F2A37"/>
                 </a:solidFill>
                 <a:latin typeface="Amiri" pitchFamily="2" charset="-78"/>
+                <a:ea typeface="Amiri" pitchFamily="2" charset="-78"/>
                 <a:cs typeface="Amiri" pitchFamily="2" charset="-78"/>
               </a:rPr>
               <a:t>يُشَارُ إِلَى أَنَّ</a:t>
@@ -6964,6 +7002,7 @@
                   <a:srgbClr val="9AA1AB"/>
                 </a:solidFill>
                 <a:latin typeface="Amiri" pitchFamily="2" charset="-78"/>
+                <a:ea typeface="Amiri" pitchFamily="2" charset="-78"/>
                 <a:cs typeface="Amiri" pitchFamily="2" charset="-78"/>
               </a:rPr>
               <a:t>لِكَيْ</a:t>
@@ -7065,6 +7104,7 @@
                   <a:srgbClr val="9AA1AB"/>
                 </a:solidFill>
                 <a:latin typeface="Amiri" pitchFamily="2" charset="-78"/>
+                <a:ea typeface="Amiri" pitchFamily="2" charset="-78"/>
                 <a:cs typeface="Amiri" pitchFamily="2" charset="-78"/>
               </a:rPr>
               <a:t>مِنْ نَاحِيَةٍ أُخْرَى</a:t>
@@ -7103,6 +7143,7 @@
                   <a:srgbClr val="8A6D1E"/>
                 </a:solidFill>
                 <a:latin typeface="Amiri" pitchFamily="2" charset="-78"/>
+                <a:ea typeface="Amiri" pitchFamily="2" charset="-78"/>
                 <a:cs typeface="Amiri" pitchFamily="2" charset="-78"/>
               </a:rPr>
               <a:t>وَيُشَارُ إِلَى أَنَّ …</a:t>
@@ -7606,6 +7647,7 @@
                   <a:srgbClr val="8A6D1E"/>
                 </a:solidFill>
                 <a:latin typeface="Amiri" pitchFamily="2" charset="-78"/>
+                <a:ea typeface="Amiri" pitchFamily="2" charset="-78"/>
                 <a:cs typeface="Amiri" pitchFamily="2" charset="-78"/>
               </a:rPr>
               <a:t>إِعَادَةَ اسْتِخْدَامِ … وَتَرْشِيدَ الاسْتِهْلَاكِ</a:t>
@@ -8745,6 +8787,7 @@
                   <a:srgbClr val="D4AF37"/>
                 </a:solidFill>
                 <a:latin typeface="Amiri" pitchFamily="2" charset="-78"/>
+                <a:ea typeface="Amiri" pitchFamily="2" charset="-78"/>
                 <a:cs typeface="Amiri" pitchFamily="2" charset="-78"/>
               </a:rPr>
               <a:t>م</a:t>
@@ -9065,6 +9108,7 @@
                   <a:srgbClr val="8A6D1E"/>
                 </a:solidFill>
                 <a:latin typeface="Amiri" pitchFamily="2" charset="-78"/>
+                <a:ea typeface="Amiri" pitchFamily="2" charset="-78"/>
                 <a:cs typeface="Amiri" pitchFamily="2" charset="-78"/>
               </a:rPr>
               <a:t>الاِسْتِمَاعُ</a:t>
@@ -11864,6 +11908,7 @@
                   <a:srgbClr val="D4AF37"/>
                 </a:solidFill>
                 <a:latin typeface="Amiri" pitchFamily="2" charset="-78"/>
+                <a:ea typeface="Amiri" pitchFamily="2" charset="-78"/>
                 <a:cs typeface="Amiri" pitchFamily="2" charset="-78"/>
               </a:rPr>
               <a:t>م</a:t>
@@ -12184,6 +12229,7 @@
                   <a:srgbClr val="8A6D1E"/>
                 </a:solidFill>
                 <a:latin typeface="Amiri" pitchFamily="2" charset="-78"/>
+                <a:ea typeface="Amiri" pitchFamily="2" charset="-78"/>
                 <a:cs typeface="Amiri" pitchFamily="2" charset="-78"/>
               </a:rPr>
               <a:t>الإِجَابَاتُ</a:t>
@@ -12725,6 +12771,7 @@
                   <a:srgbClr val="8A6D1E"/>
                 </a:solidFill>
                 <a:latin typeface="Amiri" pitchFamily="2" charset="-78"/>
+                <a:ea typeface="Amiri" pitchFamily="2" charset="-78"/>
                 <a:cs typeface="Amiri" pitchFamily="2" charset="-78"/>
               </a:rPr>
               <a:t>أُؤَيِّدُ الطَّاقَةَ الشَّمْسِيَّةَ وَالشَّبَكَاتِ الذَّكِيَّةَ</a:t>
@@ -13228,6 +13275,7 @@
                   <a:srgbClr val="8A6D1E"/>
                 </a:solidFill>
                 <a:latin typeface="Amiri" pitchFamily="2" charset="-78"/>
+                <a:ea typeface="Amiri" pitchFamily="2" charset="-78"/>
                 <a:cs typeface="Amiri" pitchFamily="2" charset="-78"/>
               </a:rPr>
               <a:t>ارْتِفَاعَ التَّكْلِفَةِ وَجَمْعَ البَيَانَاتِ الشَّخْصِيَّةِ</a:t>
@@ -13731,6 +13779,7 @@
                   <a:srgbClr val="8A6D1E"/>
                 </a:solidFill>
                 <a:latin typeface="Amiri" pitchFamily="2" charset="-78"/>
+                <a:ea typeface="Amiri" pitchFamily="2" charset="-78"/>
                 <a:cs typeface="Amiri" pitchFamily="2" charset="-78"/>
               </a:rPr>
               <a:t>أُوَافِقُ عَلَى تَقْلِيلِ الهَدْرِ</a:t>
@@ -14234,6 +14283,7 @@
                   <a:srgbClr val="8A6D1E"/>
                 </a:solidFill>
                 <a:latin typeface="Amiri" pitchFamily="2" charset="-78"/>
+                <a:ea typeface="Amiri" pitchFamily="2" charset="-78"/>
                 <a:cs typeface="Amiri" pitchFamily="2" charset="-78"/>
               </a:rPr>
               <a:t>نَخْتَلِفُ فِي طَرِيقَةِ التَّطْبِيقِ</a:t>
@@ -14737,6 +14787,7 @@
                   <a:srgbClr val="8A6D1E"/>
                 </a:solidFill>
                 <a:latin typeface="Amiri" pitchFamily="2" charset="-78"/>
+                <a:ea typeface="Amiri" pitchFamily="2" charset="-78"/>
                 <a:cs typeface="Amiri" pitchFamily="2" charset="-78"/>
               </a:rPr>
               <a:t>لِأَنَّهَا تُقَلِّلُ الهَدْرَ</a:t>
@@ -15240,6 +15291,7 @@
                   <a:srgbClr val="8A6D1E"/>
                 </a:solidFill>
                 <a:latin typeface="Amiri" pitchFamily="2" charset="-78"/>
+                <a:ea typeface="Amiri" pitchFamily="2" charset="-78"/>
                 <a:cs typeface="Amiri" pitchFamily="2" charset="-78"/>
               </a:rPr>
               <a:t>مُتَّفِقَانِ عَلَى الهَدَفِ … نَخْتَلِفُ فِي طَرِيقَةِ التَّطْبِيقِ</a:t>
@@ -15373,6 +15425,7 @@
                   <a:srgbClr val="D4AF37"/>
                 </a:solidFill>
                 <a:latin typeface="Amiri" pitchFamily="2" charset="-78"/>
+                <a:ea typeface="Amiri" pitchFamily="2" charset="-78"/>
                 <a:cs typeface="Amiri" pitchFamily="2" charset="-78"/>
               </a:rPr>
               <a:t>م</a:t>
@@ -15693,6 +15746,7 @@
                   <a:srgbClr val="8A6D1E"/>
                 </a:solidFill>
                 <a:latin typeface="Amiri" pitchFamily="2" charset="-78"/>
+                <a:ea typeface="Amiri" pitchFamily="2" charset="-78"/>
                 <a:cs typeface="Amiri" pitchFamily="2" charset="-78"/>
               </a:rPr>
               <a:t>الاِسْتِمَاعُ</a:t>
@@ -18157,6 +18211,7 @@
                   <a:srgbClr val="1F2A37"/>
                 </a:solidFill>
                 <a:latin typeface="Amiri" pitchFamily="2" charset="-78"/>
+                <a:ea typeface="Amiri" pitchFamily="2" charset="-78"/>
                 <a:cs typeface="Amiri" pitchFamily="2" charset="-78"/>
               </a:rPr>
               <a:t>يُؤَكِّدُ</a:t>
@@ -18258,6 +18313,7 @@
                   <a:srgbClr val="1F2A37"/>
                 </a:solidFill>
                 <a:latin typeface="Amiri" pitchFamily="2" charset="-78"/>
+                <a:ea typeface="Amiri" pitchFamily="2" charset="-78"/>
                 <a:cs typeface="Amiri" pitchFamily="2" charset="-78"/>
               </a:rPr>
               <a:t>يَتَفَاعَلُ مَعَ</a:t>
@@ -18359,6 +18415,7 @@
                   <a:srgbClr val="1F2A37"/>
                 </a:solidFill>
                 <a:latin typeface="Amiri" pitchFamily="2" charset="-78"/>
+                <a:ea typeface="Amiri" pitchFamily="2" charset="-78"/>
                 <a:cs typeface="Amiri" pitchFamily="2" charset="-78"/>
               </a:rPr>
               <a:t>يُعَلِّقُ عَلَى</a:t>
@@ -18492,6 +18549,7 @@
                   <a:srgbClr val="D4AF37"/>
                 </a:solidFill>
                 <a:latin typeface="Amiri" pitchFamily="2" charset="-78"/>
+                <a:ea typeface="Amiri" pitchFamily="2" charset="-78"/>
                 <a:cs typeface="Amiri" pitchFamily="2" charset="-78"/>
               </a:rPr>
               <a:t>م</a:t>
@@ -18812,6 +18870,7 @@
                   <a:srgbClr val="8A6D1E"/>
                 </a:solidFill>
                 <a:latin typeface="Amiri" pitchFamily="2" charset="-78"/>
+                <a:ea typeface="Amiri" pitchFamily="2" charset="-78"/>
                 <a:cs typeface="Amiri" pitchFamily="2" charset="-78"/>
               </a:rPr>
               <a:t>الإِجَابَاتُ</a:t>
@@ -19353,6 +19412,7 @@
                   <a:srgbClr val="8A6D1E"/>
                 </a:solidFill>
                 <a:latin typeface="Amiri" pitchFamily="2" charset="-78"/>
+                <a:ea typeface="Amiri" pitchFamily="2" charset="-78"/>
                 <a:cs typeface="Amiri" pitchFamily="2" charset="-78"/>
               </a:rPr>
               <a:t>خَمْسًا وَثَلَاثِينَ فِي المِئَةِ</a:t>
@@ -19856,6 +19916,7 @@
                   <a:srgbClr val="8A6D1E"/>
                 </a:solidFill>
                 <a:latin typeface="Amiri" pitchFamily="2" charset="-78"/>
+                <a:ea typeface="Amiri" pitchFamily="2" charset="-78"/>
                 <a:cs typeface="Amiri" pitchFamily="2" charset="-78"/>
               </a:rPr>
               <a:t>وَلٰكِنَّ المَوْعِدَ الجَدِيدَ هُوَ ٢٠٣٢</a:t>
@@ -20359,6 +20420,7 @@
                   <a:srgbClr val="8A6D1E"/>
                 </a:solidFill>
                 <a:latin typeface="Amiri" pitchFamily="2" charset="-78"/>
+                <a:ea typeface="Amiri" pitchFamily="2" charset="-78"/>
                 <a:cs typeface="Amiri" pitchFamily="2" charset="-78"/>
               </a:rPr>
               <a:t>التِّقْنِيَّةَ وَحْدَهَا لَا تَكْفِي</a:t>
@@ -20862,6 +20924,7 @@
                   <a:srgbClr val="8A6D1E"/>
                 </a:solidFill>
                 <a:latin typeface="Amiri" pitchFamily="2" charset="-78"/>
+                <a:ea typeface="Amiri" pitchFamily="2" charset="-78"/>
                 <a:cs typeface="Amiri" pitchFamily="2" charset="-78"/>
               </a:rPr>
               <a:t>مِنْ إِنْتَاجِ الكَهْرَبَاءِ</a:t>
@@ -21365,6 +21428,7 @@
                   <a:srgbClr val="8A6D1E"/>
                 </a:solidFill>
                 <a:latin typeface="Amiri" pitchFamily="2" charset="-78"/>
+                <a:ea typeface="Amiri" pitchFamily="2" charset="-78"/>
                 <a:cs typeface="Amiri" pitchFamily="2" charset="-78"/>
               </a:rPr>
               <a:t>كَانَ مِنَ المُقَرَّرِ … ٢٠٣٠</a:t>
@@ -21628,6 +21692,7 @@
                   <a:srgbClr val="1F2A37"/>
                 </a:solidFill>
                 <a:latin typeface="Amiri" pitchFamily="2" charset="-78"/>
+                <a:ea typeface="Amiri" pitchFamily="2" charset="-78"/>
                 <a:cs typeface="Amiri" pitchFamily="2" charset="-78"/>
               </a:rPr>
               <a:t>يُؤَكِّدُ</a:t>
@@ -21729,6 +21794,7 @@
                   <a:srgbClr val="9AA1AB"/>
                 </a:solidFill>
                 <a:latin typeface="Amiri" pitchFamily="2" charset="-78"/>
+                <a:ea typeface="Amiri" pitchFamily="2" charset="-78"/>
                 <a:cs typeface="Amiri" pitchFamily="2" charset="-78"/>
               </a:rPr>
               <a:t>يَتَفَاعَلُ مَعَ</a:t>
@@ -21830,6 +21896,7 @@
                   <a:srgbClr val="9AA1AB"/>
                 </a:solidFill>
                 <a:latin typeface="Amiri" pitchFamily="2" charset="-78"/>
+                <a:ea typeface="Amiri" pitchFamily="2" charset="-78"/>
                 <a:cs typeface="Amiri" pitchFamily="2" charset="-78"/>
               </a:rPr>
               <a:t>يُعَلِّقُ عَلَى</a:t>
@@ -21868,6 +21935,7 @@
                   <a:srgbClr val="8A6D1E"/>
                 </a:solidFill>
                 <a:latin typeface="Amiri" pitchFamily="2" charset="-78"/>
+                <a:ea typeface="Amiri" pitchFamily="2" charset="-78"/>
                 <a:cs typeface="Amiri" pitchFamily="2" charset="-78"/>
               </a:rPr>
               <a:t>وَيُؤَكِّدُ الخَبِيرُ أَنَّ …</a:t>
@@ -22001,6 +22069,7 @@
                   <a:srgbClr val="D4AF37"/>
                 </a:solidFill>
                 <a:latin typeface="Amiri" pitchFamily="2" charset="-78"/>
+                <a:ea typeface="Amiri" pitchFamily="2" charset="-78"/>
                 <a:cs typeface="Amiri" pitchFamily="2" charset="-78"/>
               </a:rPr>
               <a:t>م</a:t>
@@ -22321,6 +22390,7 @@
                   <a:srgbClr val="8A6D1E"/>
                 </a:solidFill>
                 <a:latin typeface="Amiri" pitchFamily="2" charset="-78"/>
+                <a:ea typeface="Amiri" pitchFamily="2" charset="-78"/>
                 <a:cs typeface="Amiri" pitchFamily="2" charset="-78"/>
               </a:rPr>
               <a:t>التِّقْنِيَّةُ وَالبِيئَةُ</a:t>
@@ -22434,6 +22504,7 @@
                   <a:srgbClr val="1F2A37"/>
                 </a:solidFill>
                 <a:latin typeface="Amiri" pitchFamily="2" charset="-78"/>
+                <a:ea typeface="Amiri" pitchFamily="2" charset="-78"/>
                 <a:cs typeface="Amiri" pitchFamily="2" charset="-78"/>
               </a:rPr>
               <a:t>يُشَارُ إِلَى أَنَّ تَغَيُّرَ المَنَاخِ يَزِيدُ شُحَّ المِيَاهِ فِي مَنَاطِقَ عَرَبِيَّةٍ عِدَّةٍ. فَبِسَبَبِ طُولِ فَتَرَاتِ الجَفَافِ، يَنْخَفِضُ المَخْزُونُ الجَوْفِيُّ وَتَتَضَرَّرُ الزِّرَاعَةُ. وَفِي المُدُنِ، يُلَوَّثُ الهَوَاءُ بِعَوَادِمِ السَّيَّارَاتِ. لِذٰلِكَ تَسْتَثْمِرُ بَعْضُ البَلَدِيَّاتِ فِي النَّقْلِ الكَهْرَبَائِيِّ وَالأَنْظِمَةِ الذَّكِيَّةِ. وَفْقًا لِبَيَانَاتِ إِحْدَى البَلَدِيَّاتِ، انْخَفَضَ اسْتِهْلَاكُ الكَهْرَبَاءِ فِي المَبَانِي العَامَّةِ بِنِسْبَةِ ١٨٪ بَعْدَ تَرْكِيبِ أَنْظِمَةٍ تُطْفِئُ الإِضَاءَةَ فِي الغُرَفِ الفَارِغَةِ. مَعَ ذٰلِكَ، هٰذِهِ الحُلُولُ مُكَلِّفَةٌ وَقَدْ تَجْمَعُ بَيَانَاتٍ شَخْصِيَّةً. فِي رَأْيِي، التِّقْنِيَّةُ جُزْءٌ مُهِمٌّ مِنَ الحَلِّ، شَرِيطَةَ أَنْ تُحْمَى الخُصُوصِيَّةُ وَأَنْ تَصْحَبَهَا سِيَاسَاتٌ وَسُلُوكٌ مَسْؤُولٌ.</a:t>
@@ -22567,6 +22638,7 @@
                   <a:srgbClr val="D4AF37"/>
                 </a:solidFill>
                 <a:latin typeface="Amiri" pitchFamily="2" charset="-78"/>
+                <a:ea typeface="Amiri" pitchFamily="2" charset="-78"/>
                 <a:cs typeface="Amiri" pitchFamily="2" charset="-78"/>
               </a:rPr>
               <a:t>م</a:t>
@@ -22887,6 +22959,7 @@
                   <a:srgbClr val="8A6D1E"/>
                 </a:solidFill>
                 <a:latin typeface="Amiri" pitchFamily="2" charset="-78"/>
+                <a:ea typeface="Amiri" pitchFamily="2" charset="-78"/>
                 <a:cs typeface="Amiri" pitchFamily="2" charset="-78"/>
               </a:rPr>
               <a:t>أَسْئِلَةُ القِرَاءَةِ</a:t>
@@ -24037,6 +24110,7 @@
                   <a:srgbClr val="1F2A37"/>
                 </a:solidFill>
                 <a:latin typeface="Amiri" pitchFamily="2" charset="-78"/>
+                <a:ea typeface="Amiri" pitchFamily="2" charset="-78"/>
                 <a:cs typeface="Amiri" pitchFamily="2" charset="-78"/>
               </a:rPr>
               <a:t>يُلَوَّثُ الهَوَاءُ</a:t>
@@ -24138,6 +24212,7 @@
                   <a:srgbClr val="1F2A37"/>
                 </a:solidFill>
                 <a:latin typeface="Amiri" pitchFamily="2" charset="-78"/>
+                <a:ea typeface="Amiri" pitchFamily="2" charset="-78"/>
                 <a:cs typeface="Amiri" pitchFamily="2" charset="-78"/>
               </a:rPr>
               <a:t>يَسْتَخْدِمُ النَّاسُ</a:t>
@@ -24239,6 +24314,7 @@
                   <a:srgbClr val="1F2A37"/>
                 </a:solidFill>
                 <a:latin typeface="Amiri" pitchFamily="2" charset="-78"/>
+                <a:ea typeface="Amiri" pitchFamily="2" charset="-78"/>
                 <a:cs typeface="Amiri" pitchFamily="2" charset="-78"/>
               </a:rPr>
               <a:t>تُسَاعِدُ الشَّبَكَةُ</a:t>
@@ -24825,6 +24901,7 @@
                   <a:srgbClr val="1B3B6F"/>
                 </a:solidFill>
                 <a:latin typeface="Amiri" pitchFamily="2" charset="-78"/>
+                <a:ea typeface="Amiri" pitchFamily="2" charset="-78"/>
                 <a:cs typeface="Amiri" pitchFamily="2" charset="-78"/>
               </a:rPr>
               <a:t>لِأَنَّهَا تُقَلِّلُ الهَدْرَ</a:t>
@@ -24939,6 +25016,7 @@
                   <a:srgbClr val="1F2A37"/>
                 </a:solidFill>
                 <a:latin typeface="Amiri" pitchFamily="2" charset="-78"/>
+                <a:ea typeface="Amiri" pitchFamily="2" charset="-78"/>
                 <a:cs typeface="Amiri" pitchFamily="2" charset="-78"/>
               </a:rPr>
               <a:t>الأَنْظِمَةُ</a:t>
@@ -25040,6 +25118,7 @@
                   <a:srgbClr val="1F2A37"/>
                 </a:solidFill>
                 <a:latin typeface="Amiri" pitchFamily="2" charset="-78"/>
+                <a:ea typeface="Amiri" pitchFamily="2" charset="-78"/>
                 <a:cs typeface="Amiri" pitchFamily="2" charset="-78"/>
               </a:rPr>
               <a:t>المَبَانِي</a:t>
@@ -25141,6 +25220,7 @@
                   <a:srgbClr val="1F2A37"/>
                 </a:solidFill>
                 <a:latin typeface="Amiri" pitchFamily="2" charset="-78"/>
+                <a:ea typeface="Amiri" pitchFamily="2" charset="-78"/>
                 <a:cs typeface="Amiri" pitchFamily="2" charset="-78"/>
               </a:rPr>
               <a:t>الهَدْرُ</a:t>
@@ -25274,6 +25354,7 @@
                   <a:srgbClr val="D4AF37"/>
                 </a:solidFill>
                 <a:latin typeface="Amiri" pitchFamily="2" charset="-78"/>
+                <a:ea typeface="Amiri" pitchFamily="2" charset="-78"/>
                 <a:cs typeface="Amiri" pitchFamily="2" charset="-78"/>
               </a:rPr>
               <a:t>م</a:t>
@@ -25594,6 +25675,7 @@
                   <a:srgbClr val="8A6D1E"/>
                 </a:solidFill>
                 <a:latin typeface="Amiri" pitchFamily="2" charset="-78"/>
+                <a:ea typeface="Amiri" pitchFamily="2" charset="-78"/>
                 <a:cs typeface="Amiri" pitchFamily="2" charset="-78"/>
               </a:rPr>
               <a:t>الإِجَابَاتُ</a:t>
@@ -26135,6 +26217,7 @@
                   <a:srgbClr val="8A6D1E"/>
                 </a:solidFill>
                 <a:latin typeface="Amiri" pitchFamily="2" charset="-78"/>
+                <a:ea typeface="Amiri" pitchFamily="2" charset="-78"/>
                 <a:cs typeface="Amiri" pitchFamily="2" charset="-78"/>
               </a:rPr>
               <a:t>جُزْءٌ مُهِمٌّ مِنَ الحَلِّ، شَرِيطَةَ أَنْ …</a:t>
@@ -26638,6 +26721,7 @@
                   <a:srgbClr val="8A6D1E"/>
                 </a:solidFill>
                 <a:latin typeface="Amiri" pitchFamily="2" charset="-78"/>
+                <a:ea typeface="Amiri" pitchFamily="2" charset="-78"/>
                 <a:cs typeface="Amiri" pitchFamily="2" charset="-78"/>
               </a:rPr>
               <a:t>شُحَّ المِيَاهِ … طُولِ فَتَرَاتِ الجَفَافِ</a:t>
@@ -26901,6 +26985,7 @@
                   <a:srgbClr val="1F2A37"/>
                 </a:solidFill>
                 <a:latin typeface="Amiri" pitchFamily="2" charset="-78"/>
+                <a:ea typeface="Amiri" pitchFamily="2" charset="-78"/>
                 <a:cs typeface="Amiri" pitchFamily="2" charset="-78"/>
               </a:rPr>
               <a:t>يُلَوَّثُ الهَوَاءُ</a:t>
@@ -27002,6 +27087,7 @@
                   <a:srgbClr val="9AA1AB"/>
                 </a:solidFill>
                 <a:latin typeface="Amiri" pitchFamily="2" charset="-78"/>
+                <a:ea typeface="Amiri" pitchFamily="2" charset="-78"/>
                 <a:cs typeface="Amiri" pitchFamily="2" charset="-78"/>
               </a:rPr>
               <a:t>يَسْتَخْدِمُ النَّاسُ</a:t>
@@ -27103,6 +27189,7 @@
                   <a:srgbClr val="9AA1AB"/>
                 </a:solidFill>
                 <a:latin typeface="Amiri" pitchFamily="2" charset="-78"/>
+                <a:ea typeface="Amiri" pitchFamily="2" charset="-78"/>
                 <a:cs typeface="Amiri" pitchFamily="2" charset="-78"/>
               </a:rPr>
               <a:t>تُسَاعِدُ الشَّبَكَةُ</a:t>
@@ -27644,6 +27731,7 @@
                   <a:srgbClr val="8A6D1E"/>
                 </a:solidFill>
                 <a:latin typeface="Amiri" pitchFamily="2" charset="-78"/>
+                <a:ea typeface="Amiri" pitchFamily="2" charset="-78"/>
                 <a:cs typeface="Amiri" pitchFamily="2" charset="-78"/>
               </a:rPr>
               <a:t>بِنِسْبَةِ ١٨٪</a:t>
@@ -27792,6 +27880,7 @@
                   <a:srgbClr val="1B3B6F"/>
                 </a:solidFill>
                 <a:latin typeface="Amiri" pitchFamily="2" charset="-78"/>
+                <a:ea typeface="Amiri" pitchFamily="2" charset="-78"/>
                 <a:cs typeface="Amiri" pitchFamily="2" charset="-78"/>
               </a:rPr>
               <a:t>لِأَنَّهَا تُقَلِّلُ الهَدْرَ</a:t>
@@ -27933,6 +28022,7 @@
                   <a:srgbClr val="1F2A37"/>
                 </a:solidFill>
                 <a:latin typeface="Amiri" pitchFamily="2" charset="-78"/>
+                <a:ea typeface="Amiri" pitchFamily="2" charset="-78"/>
                 <a:cs typeface="Amiri" pitchFamily="2" charset="-78"/>
               </a:rPr>
               <a:t>الأَنْظِمَةُ</a:t>
@@ -28034,6 +28124,7 @@
                   <a:srgbClr val="9AA1AB"/>
                 </a:solidFill>
                 <a:latin typeface="Amiri" pitchFamily="2" charset="-78"/>
+                <a:ea typeface="Amiri" pitchFamily="2" charset="-78"/>
                 <a:cs typeface="Amiri" pitchFamily="2" charset="-78"/>
               </a:rPr>
               <a:t>المَبَانِي</a:t>
@@ -28135,6 +28226,7 @@
                   <a:srgbClr val="9AA1AB"/>
                 </a:solidFill>
                 <a:latin typeface="Amiri" pitchFamily="2" charset="-78"/>
+                <a:ea typeface="Amiri" pitchFamily="2" charset="-78"/>
                 <a:cs typeface="Amiri" pitchFamily="2" charset="-78"/>
               </a:rPr>
               <a:t>الهَدْرُ</a:t>
@@ -28306,6 +28398,7 @@
                   <a:srgbClr val="D4AF37"/>
                 </a:solidFill>
                 <a:latin typeface="Amiri" pitchFamily="2" charset="-78"/>
+                <a:ea typeface="Amiri" pitchFamily="2" charset="-78"/>
                 <a:cs typeface="Amiri" pitchFamily="2" charset="-78"/>
               </a:rPr>
               <a:t>م</a:t>
@@ -28626,6 +28719,7 @@
                   <a:srgbClr val="8A6D1E"/>
                 </a:solidFill>
                 <a:latin typeface="Amiri" pitchFamily="2" charset="-78"/>
+                <a:ea typeface="Amiri" pitchFamily="2" charset="-78"/>
                 <a:cs typeface="Amiri" pitchFamily="2" charset="-78"/>
               </a:rPr>
               <a:t>أَسْئِلَةُ القِرَاءَةِ</a:t>
@@ -28900,6 +28994,7 @@
                   <a:srgbClr val="1F2A37"/>
                 </a:solidFill>
                 <a:latin typeface="Amiri" pitchFamily="2" charset="-78"/>
+                <a:ea typeface="Amiri" pitchFamily="2" charset="-78"/>
                 <a:cs typeface="Amiri" pitchFamily="2" charset="-78"/>
               </a:rPr>
               <a:t>مِنْ نَاحِيَةٍ أُخْرَى</a:t>
@@ -29001,6 +29096,7 @@
                   <a:srgbClr val="1F2A37"/>
                 </a:solidFill>
                 <a:latin typeface="Amiri" pitchFamily="2" charset="-78"/>
+                <a:ea typeface="Amiri" pitchFamily="2" charset="-78"/>
                 <a:cs typeface="Amiri" pitchFamily="2" charset="-78"/>
               </a:rPr>
               <a:t>عَلَى السَّاحِلِ</a:t>
@@ -29102,6 +29198,7 @@
                   <a:srgbClr val="1F2A37"/>
                 </a:solidFill>
                 <a:latin typeface="Amiri" pitchFamily="2" charset="-78"/>
+                <a:ea typeface="Amiri" pitchFamily="2" charset="-78"/>
                 <a:cs typeface="Amiri" pitchFamily="2" charset="-78"/>
               </a:rPr>
               <a:t>وَفْقًا لِبَيَانَاتِ البَلَدِيَّةِ</a:t>
@@ -29776,6 +29873,7 @@
                   <a:srgbClr val="1F2A37"/>
                 </a:solidFill>
                 <a:latin typeface="Amiri" pitchFamily="2" charset="-78"/>
+                <a:ea typeface="Amiri" pitchFamily="2" charset="-78"/>
                 <a:cs typeface="Amiri" pitchFamily="2" charset="-78"/>
               </a:rPr>
               <a:t>عَلَاوَةً عَلَى ذٰلِكَ</a:t>
@@ -29877,6 +29975,7 @@
                   <a:srgbClr val="1F2A37"/>
                 </a:solidFill>
                 <a:latin typeface="Amiri" pitchFamily="2" charset="-78"/>
+                <a:ea typeface="Amiri" pitchFamily="2" charset="-78"/>
                 <a:cs typeface="Amiri" pitchFamily="2" charset="-78"/>
               </a:rPr>
               <a:t>مَعَ ذٰلِكَ</a:t>
@@ -29978,6 +30077,7 @@
                   <a:srgbClr val="1F2A37"/>
                 </a:solidFill>
                 <a:latin typeface="Amiri" pitchFamily="2" charset="-78"/>
+                <a:ea typeface="Amiri" pitchFamily="2" charset="-78"/>
                 <a:cs typeface="Amiri" pitchFamily="2" charset="-78"/>
               </a:rPr>
               <a:t>نَتِيجَةً لِذٰلِكَ</a:t>
@@ -30987,6 +31087,7 @@
                   <a:srgbClr val="D4AF37"/>
                 </a:solidFill>
                 <a:latin typeface="Amiri" pitchFamily="2" charset="-78"/>
+                <a:ea typeface="Amiri" pitchFamily="2" charset="-78"/>
                 <a:cs typeface="Amiri" pitchFamily="2" charset="-78"/>
               </a:rPr>
               <a:t>م</a:t>
@@ -31307,6 +31408,7 @@
                   <a:srgbClr val="8A6D1E"/>
                 </a:solidFill>
                 <a:latin typeface="Amiri" pitchFamily="2" charset="-78"/>
+                <a:ea typeface="Amiri" pitchFamily="2" charset="-78"/>
                 <a:cs typeface="Amiri" pitchFamily="2" charset="-78"/>
               </a:rPr>
               <a:t>آدَابُ الصَّفِّ</a:t>
@@ -32838,6 +32940,7 @@
                   <a:srgbClr val="D4AF37"/>
                 </a:solidFill>
                 <a:latin typeface="Amiri" pitchFamily="2" charset="-78"/>
+                <a:ea typeface="Amiri" pitchFamily="2" charset="-78"/>
                 <a:cs typeface="Amiri" pitchFamily="2" charset="-78"/>
               </a:rPr>
               <a:t>م</a:t>
@@ -33158,6 +33261,7 @@
                   <a:srgbClr val="8A6D1E"/>
                 </a:solidFill>
                 <a:latin typeface="Amiri" pitchFamily="2" charset="-78"/>
+                <a:ea typeface="Amiri" pitchFamily="2" charset="-78"/>
                 <a:cs typeface="Amiri" pitchFamily="2" charset="-78"/>
               </a:rPr>
               <a:t>الإِجَابَاتُ</a:t>
@@ -33432,6 +33536,7 @@
                   <a:srgbClr val="9AA1AB"/>
                 </a:solidFill>
                 <a:latin typeface="Amiri" pitchFamily="2" charset="-78"/>
+                <a:ea typeface="Amiri" pitchFamily="2" charset="-78"/>
                 <a:cs typeface="Amiri" pitchFamily="2" charset="-78"/>
               </a:rPr>
               <a:t>مِنْ نَاحِيَةٍ أُخْرَى</a:t>
@@ -33533,6 +33638,7 @@
                   <a:srgbClr val="9AA1AB"/>
                 </a:solidFill>
                 <a:latin typeface="Amiri" pitchFamily="2" charset="-78"/>
+                <a:ea typeface="Amiri" pitchFamily="2" charset="-78"/>
                 <a:cs typeface="Amiri" pitchFamily="2" charset="-78"/>
               </a:rPr>
               <a:t>عَلَى السَّاحِلِ</a:t>
@@ -33661,6 +33767,7 @@
                   <a:srgbClr val="1F2A37"/>
                 </a:solidFill>
                 <a:latin typeface="Amiri" pitchFamily="2" charset="-78"/>
+                <a:ea typeface="Amiri" pitchFamily="2" charset="-78"/>
                 <a:cs typeface="Amiri" pitchFamily="2" charset="-78"/>
               </a:rPr>
               <a:t>وَفْقًا لِبَيَانَاتِ البَلَدِيَّةِ</a:t>
@@ -34202,6 +34309,7 @@
                   <a:srgbClr val="8A6D1E"/>
                 </a:solidFill>
                 <a:latin typeface="Amiri" pitchFamily="2" charset="-78"/>
+                <a:ea typeface="Amiri" pitchFamily="2" charset="-78"/>
                 <a:cs typeface="Amiri" pitchFamily="2" charset="-78"/>
               </a:rPr>
               <a:t>مُكَلِّفَةٌ وَقَدْ تَجْمَعُ بَيَانَاتٍ شَخْصِيَّةً</a:t>
@@ -34438,6 +34546,7 @@
                   <a:srgbClr val="9AA1AB"/>
                 </a:solidFill>
                 <a:latin typeface="Amiri" pitchFamily="2" charset="-78"/>
+                <a:ea typeface="Amiri" pitchFamily="2" charset="-78"/>
                 <a:cs typeface="Amiri" pitchFamily="2" charset="-78"/>
               </a:rPr>
               <a:t>عَلَاوَةً عَلَى ذٰلِكَ</a:t>
@@ -34566,6 +34675,7 @@
                   <a:srgbClr val="1F2A37"/>
                 </a:solidFill>
                 <a:latin typeface="Amiri" pitchFamily="2" charset="-78"/>
+                <a:ea typeface="Amiri" pitchFamily="2" charset="-78"/>
                 <a:cs typeface="Amiri" pitchFamily="2" charset="-78"/>
               </a:rPr>
               <a:t>مَعَ ذٰلِكَ</a:t>
@@ -34667,6 +34777,7 @@
                   <a:srgbClr val="9AA1AB"/>
                 </a:solidFill>
                 <a:latin typeface="Amiri" pitchFamily="2" charset="-78"/>
+                <a:ea typeface="Amiri" pitchFamily="2" charset="-78"/>
                 <a:cs typeface="Amiri" pitchFamily="2" charset="-78"/>
               </a:rPr>
               <a:t>نَتِيجَةً لِذٰلِكَ</a:t>
@@ -35208,6 +35319,7 @@
                   <a:srgbClr val="8A6D1E"/>
                 </a:solidFill>
                 <a:latin typeface="Amiri" pitchFamily="2" charset="-78"/>
+                <a:ea typeface="Amiri" pitchFamily="2" charset="-78"/>
                 <a:cs typeface="Amiri" pitchFamily="2" charset="-78"/>
               </a:rPr>
               <a:t>تَسْتَثْمِرُ … فِي النَّقْلِ الكَهْرَبَائِيِّ</a:t>
@@ -35844,6 +35956,7 @@
                   <a:srgbClr val="D4AF37"/>
                 </a:solidFill>
                 <a:latin typeface="Amiri" pitchFamily="2" charset="-78"/>
+                <a:ea typeface="Amiri" pitchFamily="2" charset="-78"/>
                 <a:cs typeface="Amiri" pitchFamily="2" charset="-78"/>
               </a:rPr>
               <a:t>م</a:t>
@@ -36164,6 +36277,7 @@
                   <a:srgbClr val="8A6D1E"/>
                 </a:solidFill>
                 <a:latin typeface="Amiri" pitchFamily="2" charset="-78"/>
+                <a:ea typeface="Amiri" pitchFamily="2" charset="-78"/>
                 <a:cs typeface="Amiri" pitchFamily="2" charset="-78"/>
               </a:rPr>
               <a:t>مِلَفُّ العَمَلِ البِيئِيِّ</a:t>
@@ -36444,6 +36558,7 @@
                   <a:srgbClr val="1B3B6F"/>
                 </a:solidFill>
                 <a:latin typeface="Amiri" pitchFamily="2" charset="-78"/>
+                <a:ea typeface="Amiri" pitchFamily="2" charset="-78"/>
                 <a:cs typeface="Amiri" pitchFamily="2" charset="-78"/>
               </a:rPr>
               <a:t>المُشْكِلَةُ البِيئِيَّةُ</a:t>
@@ -36650,6 +36765,7 @@
                   <a:srgbClr val="1B3B6F"/>
                 </a:solidFill>
                 <a:latin typeface="Amiri" pitchFamily="2" charset="-78"/>
+                <a:ea typeface="Amiri" pitchFamily="2" charset="-78"/>
                 <a:cs typeface="Amiri" pitchFamily="2" charset="-78"/>
               </a:rPr>
               <a:t>سَبَبَانِ</a:t>
@@ -36856,6 +36972,7 @@
                   <a:srgbClr val="1B3B6F"/>
                 </a:solidFill>
                 <a:latin typeface="Amiri" pitchFamily="2" charset="-78"/>
+                <a:ea typeface="Amiri" pitchFamily="2" charset="-78"/>
                 <a:cs typeface="Amiri" pitchFamily="2" charset="-78"/>
               </a:rPr>
               <a:t>دَلِيلٌ أَوْ إِحْصَائِيَّةٌ</a:t>
@@ -37062,6 +37179,7 @@
                   <a:srgbClr val="1B3B6F"/>
                 </a:solidFill>
                 <a:latin typeface="Amiri" pitchFamily="2" charset="-78"/>
+                <a:ea typeface="Amiri" pitchFamily="2" charset="-78"/>
                 <a:cs typeface="Amiri" pitchFamily="2" charset="-78"/>
               </a:rPr>
               <a:t>حَلٌّ عَمَلِيٌّ</a:t>
@@ -37268,6 +37386,7 @@
                   <a:srgbClr val="1B3B6F"/>
                 </a:solidFill>
                 <a:latin typeface="Amiri" pitchFamily="2" charset="-78"/>
+                <a:ea typeface="Amiri" pitchFamily="2" charset="-78"/>
                 <a:cs typeface="Amiri" pitchFamily="2" charset="-78"/>
               </a:rPr>
               <a:t>نَتِيجَةٌ مُتَوَقَّعَةٌ</a:t>
@@ -37422,6 +37541,7 @@
                   <a:srgbClr val="1B3B6F"/>
                 </a:solidFill>
                 <a:latin typeface="Amiri" pitchFamily="2" charset="-78"/>
+                <a:ea typeface="Amiri" pitchFamily="2" charset="-78"/>
                 <a:cs typeface="Amiri" pitchFamily="2" charset="-78"/>
               </a:rPr>
               <a:t>تَلَوُّثُ الهَوَاءِ</a:t>
@@ -37448,6 +37568,7 @@
                   <a:srgbClr val="1B3B6F"/>
                 </a:solidFill>
                 <a:latin typeface="Amiri" pitchFamily="2" charset="-78"/>
+                <a:ea typeface="Amiri" pitchFamily="2" charset="-78"/>
                 <a:cs typeface="Amiri" pitchFamily="2" charset="-78"/>
               </a:rPr>
               <a:t>عَوَادِمُ السَّيَّارَاتِ وَالمَصَانِعُ</a:t>
@@ -37474,6 +37595,7 @@
                   <a:srgbClr val="1B3B6F"/>
                 </a:solidFill>
                 <a:latin typeface="Amiri" pitchFamily="2" charset="-78"/>
+                <a:ea typeface="Amiri" pitchFamily="2" charset="-78"/>
                 <a:cs typeface="Amiri" pitchFamily="2" charset="-78"/>
               </a:rPr>
               <a:t>ارْتَفَعَ التَّلَوُّثُ بِنِسْبَةِ ١٠٪</a:t>
@@ -37500,6 +37622,7 @@
                   <a:srgbClr val="1B3B6F"/>
                 </a:solidFill>
                 <a:latin typeface="Amiri" pitchFamily="2" charset="-78"/>
+                <a:ea typeface="Amiri" pitchFamily="2" charset="-78"/>
                 <a:cs typeface="Amiri" pitchFamily="2" charset="-78"/>
               </a:rPr>
               <a:t>تَوْسِيعُ النَّقْلِ العَامِّ</a:t>
@@ -37526,6 +37649,7 @@
                   <a:srgbClr val="1B3B6F"/>
                 </a:solidFill>
                 <a:latin typeface="Amiri" pitchFamily="2" charset="-78"/>
+                <a:ea typeface="Amiri" pitchFamily="2" charset="-78"/>
                 <a:cs typeface="Amiri" pitchFamily="2" charset="-78"/>
               </a:rPr>
               <a:t>هَوَاءٌ أَنْظَفُ</a:t>
@@ -37659,6 +37783,7 @@
                   <a:srgbClr val="D4AF37"/>
                 </a:solidFill>
                 <a:latin typeface="Amiri" pitchFamily="2" charset="-78"/>
+                <a:ea typeface="Amiri" pitchFamily="2" charset="-78"/>
                 <a:cs typeface="Amiri" pitchFamily="2" charset="-78"/>
               </a:rPr>
               <a:t>م</a:t>
@@ -37979,6 +38104,7 @@
                   <a:srgbClr val="8A6D1E"/>
                 </a:solidFill>
                 <a:latin typeface="Amiri" pitchFamily="2" charset="-78"/>
+                <a:ea typeface="Amiri" pitchFamily="2" charset="-78"/>
                 <a:cs typeface="Amiri" pitchFamily="2" charset="-78"/>
               </a:rPr>
               <a:t>مَقَالٌ عَنِ البِيئَةِ وَالتِّقْنِيَّةِ</a:t>
@@ -38687,6 +38813,7 @@
                   <a:srgbClr val="1B3B6F"/>
                 </a:solidFill>
                 <a:latin typeface="Amiri" pitchFamily="2" charset="-78"/>
+                <a:ea typeface="Amiri" pitchFamily="2" charset="-78"/>
                 <a:cs typeface="Amiri" pitchFamily="2" charset="-78"/>
               </a:rPr>
               <a:t>وَفْقًا لِـ · بِنِسْبَةِ · يُشَارُ إِلَى أَنَّ</a:t>
@@ -38855,6 +38982,7 @@
                   <a:srgbClr val="1B3B6F"/>
                 </a:solidFill>
                 <a:latin typeface="Amiri" pitchFamily="2" charset="-78"/>
+                <a:ea typeface="Amiri" pitchFamily="2" charset="-78"/>
                 <a:cs typeface="Amiri" pitchFamily="2" charset="-78"/>
               </a:rPr>
               <a:t>عَلَى الرَّغْمِ مِنْ أَنَّ … فَإِنَّ · شَرِيطَةَ أَنْ</a:t>
@@ -39009,6 +39137,7 @@
                   <a:srgbClr val="1B3B6F"/>
                 </a:solidFill>
                 <a:latin typeface="Amiri" pitchFamily="2" charset="-78"/>
+                <a:ea typeface="Amiri" pitchFamily="2" charset="-78"/>
                 <a:cs typeface="Amiri" pitchFamily="2" charset="-78"/>
               </a:rPr>
               <a:t>أَنْ</a:t>
@@ -39035,6 +39164,7 @@
                   <a:srgbClr val="1B3B6F"/>
                 </a:solidFill>
                 <a:latin typeface="Amiri" pitchFamily="2" charset="-78"/>
+                <a:ea typeface="Amiri" pitchFamily="2" charset="-78"/>
                 <a:cs typeface="Amiri" pitchFamily="2" charset="-78"/>
               </a:rPr>
               <a:t>لِكَيْ</a:t>
@@ -39061,6 +39191,7 @@
                   <a:srgbClr val="1B3B6F"/>
                 </a:solidFill>
                 <a:latin typeface="Amiri" pitchFamily="2" charset="-78"/>
+                <a:ea typeface="Amiri" pitchFamily="2" charset="-78"/>
                 <a:cs typeface="Amiri" pitchFamily="2" charset="-78"/>
               </a:rPr>
               <a:t>أَنَّ</a:t>
@@ -39207,6 +39338,7 @@
                   <a:srgbClr val="D4AF37"/>
                 </a:solidFill>
                 <a:latin typeface="Amiri" pitchFamily="2" charset="-78"/>
+                <a:ea typeface="Amiri" pitchFamily="2" charset="-78"/>
                 <a:cs typeface="Amiri" pitchFamily="2" charset="-78"/>
               </a:rPr>
               <a:t>م</a:t>
@@ -39527,6 +39659,7 @@
                   <a:srgbClr val="8A6D1E"/>
                 </a:solidFill>
                 <a:latin typeface="Amiri" pitchFamily="2" charset="-78"/>
+                <a:ea typeface="Amiri" pitchFamily="2" charset="-78"/>
                 <a:cs typeface="Amiri" pitchFamily="2" charset="-78"/>
               </a:rPr>
               <a:t>التَّحَدُّثُ</a:t>
@@ -40557,6 +40690,7 @@
                   <a:srgbClr val="1B3B6F"/>
                 </a:solidFill>
                 <a:latin typeface="Amiri" pitchFamily="2" charset="-78"/>
+                <a:ea typeface="Amiri" pitchFamily="2" charset="-78"/>
                 <a:cs typeface="Amiri" pitchFamily="2" charset="-78"/>
               </a:rPr>
               <a:t>لِأُصَحِّحْ ذٰلِكَ</a:t>
@@ -40703,6 +40837,7 @@
                   <a:srgbClr val="D4AF37"/>
                 </a:solidFill>
                 <a:latin typeface="Amiri" pitchFamily="2" charset="-78"/>
+                <a:ea typeface="Amiri" pitchFamily="2" charset="-78"/>
                 <a:cs typeface="Amiri" pitchFamily="2" charset="-78"/>
               </a:rPr>
               <a:t>م</a:t>
@@ -41023,6 +41158,7 @@
                   <a:srgbClr val="8A6D1E"/>
                 </a:solidFill>
                 <a:latin typeface="Amiri" pitchFamily="2" charset="-78"/>
+                <a:ea typeface="Amiri" pitchFamily="2" charset="-78"/>
                 <a:cs typeface="Amiri" pitchFamily="2" charset="-78"/>
               </a:rPr>
               <a:t>مِلَفُّ المَهَارَاتِ</a:t>
@@ -42195,6 +42331,7 @@
                   <a:srgbClr val="D4AF37"/>
                 </a:solidFill>
                 <a:latin typeface="Amiri" pitchFamily="2" charset="-78"/>
+                <a:ea typeface="Amiri" pitchFamily="2" charset="-78"/>
                 <a:cs typeface="Amiri" pitchFamily="2" charset="-78"/>
               </a:rPr>
               <a:t>م</a:t>
@@ -42515,6 +42652,7 @@
                   <a:srgbClr val="8A6D1E"/>
                 </a:solidFill>
                 <a:latin typeface="Amiri" pitchFamily="2" charset="-78"/>
+                <a:ea typeface="Amiri" pitchFamily="2" charset="-78"/>
                 <a:cs typeface="Amiri" pitchFamily="2" charset="-78"/>
               </a:rPr>
               <a:t>قَيِّمْ عَمَلَكَ</a:t>
@@ -42987,6 +43125,7 @@
                   <a:srgbClr val="1F2A37"/>
                 </a:solidFill>
                 <a:latin typeface="Amiri" pitchFamily="2" charset="-78"/>
+                <a:ea typeface="Amiri" pitchFamily="2" charset="-78"/>
                 <a:cs typeface="Amiri" pitchFamily="2" charset="-78"/>
               </a:rPr>
               <a:t>يَجِبُ عَلَى … أَنْ … لِكَيْ</a:t>
@@ -43698,6 +43837,7 @@
                   <a:srgbClr val="D4AF37"/>
                 </a:solidFill>
                 <a:latin typeface="Amiri" pitchFamily="2" charset="-78"/>
+                <a:ea typeface="Amiri" pitchFamily="2" charset="-78"/>
                 <a:cs typeface="Amiri" pitchFamily="2" charset="-78"/>
               </a:rPr>
               <a:t>م</a:t>
@@ -44018,6 +44158,7 @@
                   <a:srgbClr val="8A6D1E"/>
                 </a:solidFill>
                 <a:latin typeface="Amiri" pitchFamily="2" charset="-78"/>
+                <a:ea typeface="Amiri" pitchFamily="2" charset="-78"/>
                 <a:cs typeface="Amiri" pitchFamily="2" charset="-78"/>
               </a:rPr>
               <a:t>التَّحْضِيرُ لِلدَّرْسِ القَادِمِ</a:t>
@@ -44231,6 +44372,7 @@
                   <a:srgbClr val="1B3B6F"/>
                 </a:solidFill>
                 <a:latin typeface="Amiri" pitchFamily="2" charset="-78"/>
+                <a:ea typeface="Amiri" pitchFamily="2" charset="-78"/>
                 <a:cs typeface="Amiri" pitchFamily="2" charset="-78"/>
               </a:rPr>
               <a:t>هِوَايَةٌ</a:t>
@@ -44277,11 +44419,12 @@
               <a:buNone/>
             </a:pPr>
             <a:r>
-              <a:rPr lang="en-US" sz="1000" i="1" dirty="0">
+              <a:rPr lang="ar-SA" sz="1000" i="1" dirty="0">
                 <a:solidFill>
                   <a:srgbClr val="5A6472"/>
                 </a:solidFill>
                 <a:latin typeface="Calibri" pitchFamily="34" charset="0"/>
+                <a:ea typeface="Amiri" pitchFamily="2" charset="-78"/>
                 <a:cs typeface="Amiri" pitchFamily="2" charset="-78"/>
               </a:rPr>
               <a:t>  pl. هِوَايَاتٌ</a:t>
@@ -44320,6 +44463,7 @@
                   <a:srgbClr val="1B3B6F"/>
                 </a:solidFill>
                 <a:latin typeface="Amiri" pitchFamily="2" charset="-78"/>
+                <a:ea typeface="Amiri" pitchFamily="2" charset="-78"/>
                 <a:cs typeface="Amiri" pitchFamily="2" charset="-78"/>
               </a:rPr>
               <a:t>وَقْتُ الفَرَاغِ</a:t>
@@ -44409,6 +44553,7 @@
                   <a:srgbClr val="1B3B6F"/>
                 </a:solidFill>
                 <a:latin typeface="Amiri" pitchFamily="2" charset="-78"/>
+                <a:ea typeface="Amiri" pitchFamily="2" charset="-78"/>
                 <a:cs typeface="Amiri" pitchFamily="2" charset="-78"/>
               </a:rPr>
               <a:t>يُمَارِسُ الرِّيَاضَةَ</a:t>
@@ -44455,11 +44600,12 @@
               <a:buNone/>
             </a:pPr>
             <a:r>
-              <a:rPr lang="en-US" sz="1000" i="1" dirty="0">
+              <a:rPr lang="ar-SA" sz="1000" i="1" dirty="0">
                 <a:solidFill>
                   <a:srgbClr val="5A6472"/>
                 </a:solidFill>
                 <a:latin typeface="Calibri" pitchFamily="34" charset="0"/>
+                <a:ea typeface="Amiri" pitchFamily="2" charset="-78"/>
                 <a:cs typeface="Amiri" pitchFamily="2" charset="-78"/>
               </a:rPr>
               <a:t>  تُمَارِسُ she</a:t>
@@ -44498,6 +44644,7 @@
                   <a:srgbClr val="1B3B6F"/>
                 </a:solidFill>
                 <a:latin typeface="Amiri" pitchFamily="2" charset="-78"/>
+                <a:ea typeface="Amiri" pitchFamily="2" charset="-78"/>
                 <a:cs typeface="Amiri" pitchFamily="2" charset="-78"/>
               </a:rPr>
               <a:t>يَعْزِفُ عَلَى</a:t>
@@ -44544,11 +44691,12 @@
               <a:buNone/>
             </a:pPr>
             <a:r>
-              <a:rPr lang="en-US" sz="1000" i="1" dirty="0">
+              <a:rPr lang="ar-SA" sz="1000" i="1" dirty="0">
                 <a:solidFill>
                   <a:srgbClr val="5A6472"/>
                 </a:solidFill>
                 <a:latin typeface="Calibri" pitchFamily="34" charset="0"/>
+                <a:ea typeface="Amiri" pitchFamily="2" charset="-78"/>
                 <a:cs typeface="Amiri" pitchFamily="2" charset="-78"/>
               </a:rPr>
               <a:t>  تَعْزِفُ she</a:t>
@@ -44587,6 +44735,7 @@
                   <a:srgbClr val="1B3B6F"/>
                 </a:solidFill>
                 <a:latin typeface="Amiri" pitchFamily="2" charset="-78"/>
+                <a:ea typeface="Amiri" pitchFamily="2" charset="-78"/>
                 <a:cs typeface="Amiri" pitchFamily="2" charset="-78"/>
               </a:rPr>
               <a:t>مَرَّتَيْنِ فِي الأُسْبُوعِ</a:t>
@@ -44755,6 +44904,7 @@
                   <a:srgbClr val="1B3B6F"/>
                 </a:solidFill>
                 <a:latin typeface="Amiri" pitchFamily="2" charset="-78"/>
+                <a:ea typeface="Amiri" pitchFamily="2" charset="-78"/>
                 <a:cs typeface="Amiri" pitchFamily="2" charset="-78"/>
               </a:rPr>
               <a:t>فِي وَقْتِ فَرَاغِي … مَرَّتَيْنِ فِي الأُسْبُوعِ.</a:t>
@@ -45424,6 +45574,7 @@
                   <a:srgbClr val="FFFFFF"/>
                 </a:solidFill>
                 <a:latin typeface="Amiri" pitchFamily="2" charset="-78"/>
+                <a:ea typeface="Amiri" pitchFamily="2" charset="-78"/>
                 <a:cs typeface="Amiri" pitchFamily="2" charset="-78"/>
               </a:rPr>
               <a:t>أَحْسَنْتُمْ! إِلَى اللِّقَاءِ</a:t>
@@ -45576,6 +45727,7 @@
                   <a:srgbClr val="D4AF37"/>
                 </a:solidFill>
                 <a:latin typeface="Amiri" pitchFamily="2" charset="-78"/>
+                <a:ea typeface="Amiri" pitchFamily="2" charset="-78"/>
                 <a:cs typeface="Amiri" pitchFamily="2" charset="-78"/>
               </a:rPr>
               <a:t>الهِوَايَاتُ وَوَقْتُ الفَرَاغِ</a:t>
@@ -45709,6 +45861,7 @@
                   <a:srgbClr val="D4AF37"/>
                 </a:solidFill>
                 <a:latin typeface="Amiri" pitchFamily="2" charset="-78"/>
+                <a:ea typeface="Amiri" pitchFamily="2" charset="-78"/>
                 <a:cs typeface="Amiri" pitchFamily="2" charset="-78"/>
               </a:rPr>
               <a:t>م</a:t>
@@ -46029,6 +46182,7 @@
                   <a:srgbClr val="8A6D1E"/>
                 </a:solidFill>
                 <a:latin typeface="Amiri" pitchFamily="2" charset="-78"/>
+                <a:ea typeface="Amiri" pitchFamily="2" charset="-78"/>
                 <a:cs typeface="Amiri" pitchFamily="2" charset="-78"/>
               </a:rPr>
               <a:t>خَرِيطَةُ الدَّرْسِ</a:t>
@@ -46343,6 +46497,7 @@
                   <a:srgbClr val="0E7C86"/>
                 </a:solidFill>
                 <a:latin typeface="Amiri" pitchFamily="2" charset="-78"/>
+                <a:ea typeface="Amiri" pitchFamily="2" charset="-78"/>
                 <a:cs typeface="Amiri" pitchFamily="2" charset="-78"/>
               </a:rPr>
               <a:t>تَهْيِئَةٌ</a:t>
@@ -46619,6 +46774,7 @@
                   <a:srgbClr val="1B3B6F"/>
                 </a:solidFill>
                 <a:latin typeface="Amiri" pitchFamily="2" charset="-78"/>
+                <a:ea typeface="Amiri" pitchFamily="2" charset="-78"/>
                 <a:cs typeface="Amiri" pitchFamily="2" charset="-78"/>
               </a:rPr>
               <a:t>خُطَّةُ التَّقْيِيمِ</a:t>
@@ -46895,6 +47051,7 @@
                   <a:srgbClr val="6B4C9A"/>
                 </a:solidFill>
                 <a:latin typeface="Amiri" pitchFamily="2" charset="-78"/>
+                <a:ea typeface="Amiri" pitchFamily="2" charset="-78"/>
                 <a:cs typeface="Amiri" pitchFamily="2" charset="-78"/>
               </a:rPr>
               <a:t>الاِسْتِمَاعُ</a:t>
@@ -47171,6 +47328,7 @@
                   <a:srgbClr val="2F6FB0"/>
                 </a:solidFill>
                 <a:latin typeface="Amiri" pitchFamily="2" charset="-78"/>
+                <a:ea typeface="Amiri" pitchFamily="2" charset="-78"/>
                 <a:cs typeface="Amiri" pitchFamily="2" charset="-78"/>
               </a:rPr>
               <a:t>القِرَاءَةُ</a:t>
@@ -47447,6 +47605,7 @@
                   <a:srgbClr val="1E6B52"/>
                 </a:solidFill>
                 <a:latin typeface="Amiri" pitchFamily="2" charset="-78"/>
+                <a:ea typeface="Amiri" pitchFamily="2" charset="-78"/>
                 <a:cs typeface="Amiri" pitchFamily="2" charset="-78"/>
               </a:rPr>
               <a:t>الكِتَابَةُ وَالتَّحَدُّثُ</a:t>
@@ -47723,6 +47882,7 @@
                   <a:srgbClr val="8A6D1E"/>
                 </a:solidFill>
                 <a:latin typeface="Amiri" pitchFamily="2" charset="-78"/>
+                <a:ea typeface="Amiri" pitchFamily="2" charset="-78"/>
                 <a:cs typeface="Amiri" pitchFamily="2" charset="-78"/>
               </a:rPr>
               <a:t>الهَدَفُ</a:t>
@@ -47999,6 +48159,7 @@
                   <a:srgbClr val="C45A3C"/>
                 </a:solidFill>
                 <a:latin typeface="Amiri" pitchFamily="2" charset="-78"/>
+                <a:ea typeface="Amiri" pitchFamily="2" charset="-78"/>
                 <a:cs typeface="Amiri" pitchFamily="2" charset="-78"/>
               </a:rPr>
               <a:t>اِسْتَعِدَّ</a:t>
@@ -48242,6 +48403,7 @@
                   <a:srgbClr val="D4AF37"/>
                 </a:solidFill>
                 <a:latin typeface="Amiri" pitchFamily="2" charset="-78"/>
+                <a:ea typeface="Amiri" pitchFamily="2" charset="-78"/>
                 <a:cs typeface="Amiri" pitchFamily="2" charset="-78"/>
               </a:rPr>
               <a:t>م</a:t>
@@ -48562,6 +48724,7 @@
                   <a:srgbClr val="8A6D1E"/>
                 </a:solidFill>
                 <a:latin typeface="Amiri" pitchFamily="2" charset="-78"/>
+                <a:ea typeface="Amiri" pitchFamily="2" charset="-78"/>
                 <a:cs typeface="Amiri" pitchFamily="2" charset="-78"/>
               </a:rPr>
               <a:t>اِبْدَأِ الآنَ</a:t>
@@ -48748,6 +48911,7 @@
                   <a:srgbClr val="1B3B6F"/>
                 </a:solidFill>
                 <a:latin typeface="Amiri" pitchFamily="2" charset="-78"/>
+                <a:ea typeface="Amiri" pitchFamily="2" charset="-78"/>
                 <a:cs typeface="Amiri" pitchFamily="2" charset="-78"/>
               </a:rPr>
               <a:t>مَعَايِيرُ التَّصْحِيحِ</a:t>
@@ -49300,6 +49464,7 @@
                   <a:srgbClr val="1F2A37"/>
                 </a:solidFill>
                 <a:latin typeface="Amiri" pitchFamily="2" charset="-78"/>
+                <a:ea typeface="Amiri" pitchFamily="2" charset="-78"/>
                 <a:cs typeface="Amiri" pitchFamily="2" charset="-78"/>
               </a:rPr>
               <a:t>يَتَّسِمُ السَّاحِلُ بِمَنَاخٍ مُعْتَدِلٍ.</a:t>
@@ -49401,6 +49566,7 @@
                   <a:srgbClr val="1F2A37"/>
                 </a:solidFill>
                 <a:latin typeface="Amiri" pitchFamily="2" charset="-78"/>
+                <a:ea typeface="Amiri" pitchFamily="2" charset="-78"/>
                 <a:cs typeface="Amiri" pitchFamily="2" charset="-78"/>
               </a:rPr>
               <a:t>يَتَّسِمُ السَّاحِلُ إِلَى مَنَاخٍ مُعْتَدِلٍ.</a:t>
@@ -49502,6 +49668,7 @@
                   <a:srgbClr val="1F2A37"/>
                 </a:solidFill>
                 <a:latin typeface="Amiri" pitchFamily="2" charset="-78"/>
+                <a:ea typeface="Amiri" pitchFamily="2" charset="-78"/>
                 <a:cs typeface="Amiri" pitchFamily="2" charset="-78"/>
               </a:rPr>
               <a:t>يَتَّسِمُ السَّاحِلُ عَلَى مَنَاخٍ مُعْتَدِلٍ.</a:t>
@@ -49650,6 +49817,7 @@
                   <a:srgbClr val="1B3B6F"/>
                 </a:solidFill>
                 <a:latin typeface="Amiri" pitchFamily="2" charset="-78"/>
+                <a:ea typeface="Amiri" pitchFamily="2" charset="-78"/>
                 <a:cs typeface="Amiri" pitchFamily="2" charset="-78"/>
               </a:rPr>
               <a:t>إِلَى</a:t>
@@ -49764,6 +49932,7 @@
                   <a:srgbClr val="1F2A37"/>
                 </a:solidFill>
                 <a:latin typeface="Amiri" pitchFamily="2" charset="-78"/>
+                <a:ea typeface="Amiri" pitchFamily="2" charset="-78"/>
                 <a:cs typeface="Amiri" pitchFamily="2" charset="-78"/>
               </a:rPr>
               <a:t>بِسَبَبِ</a:t>
@@ -49865,6 +50034,7 @@
                   <a:srgbClr val="1F2A37"/>
                 </a:solidFill>
                 <a:latin typeface="Amiri" pitchFamily="2" charset="-78"/>
+                <a:ea typeface="Amiri" pitchFamily="2" charset="-78"/>
                 <a:cs typeface="Amiri" pitchFamily="2" charset="-78"/>
               </a:rPr>
               <a:t>مِمَّا</a:t>
@@ -49966,6 +50136,7 @@
                   <a:srgbClr val="1F2A37"/>
                 </a:solidFill>
                 <a:latin typeface="Amiri" pitchFamily="2" charset="-78"/>
+                <a:ea typeface="Amiri" pitchFamily="2" charset="-78"/>
                 <a:cs typeface="Amiri" pitchFamily="2" charset="-78"/>
               </a:rPr>
               <a:t>يُؤَدِّي</a:t>
@@ -50114,6 +50285,7 @@
                   <a:srgbClr val="1B3B6F"/>
                 </a:solidFill>
                 <a:latin typeface="Amiri" pitchFamily="2" charset="-78"/>
+                <a:ea typeface="Amiri" pitchFamily="2" charset="-78"/>
                 <a:cs typeface="Amiri" pitchFamily="2" charset="-78"/>
               </a:rPr>
               <a:t>أَنْ</a:t>
@@ -50228,6 +50400,7 @@
                   <a:srgbClr val="1F2A37"/>
                 </a:solidFill>
                 <a:latin typeface="Amiri" pitchFamily="2" charset="-78"/>
+                <a:ea typeface="Amiri" pitchFamily="2" charset="-78"/>
                 <a:cs typeface="Amiri" pitchFamily="2" charset="-78"/>
               </a:rPr>
               <a:t>أَنْ يُعِيدُونَ التَّدْوِيرَ</a:t>
@@ -50329,6 +50502,7 @@
                   <a:srgbClr val="1F2A37"/>
                 </a:solidFill>
                 <a:latin typeface="Amiri" pitchFamily="2" charset="-78"/>
+                <a:ea typeface="Amiri" pitchFamily="2" charset="-78"/>
                 <a:cs typeface="Amiri" pitchFamily="2" charset="-78"/>
               </a:rPr>
               <a:t>أَنْ يُعِيدُ التَّدْوِيرَ</a:t>
@@ -50430,6 +50604,7 @@
                   <a:srgbClr val="1F2A37"/>
                 </a:solidFill>
                 <a:latin typeface="Amiri" pitchFamily="2" charset="-78"/>
+                <a:ea typeface="Amiri" pitchFamily="2" charset="-78"/>
                 <a:cs typeface="Amiri" pitchFamily="2" charset="-78"/>
               </a:rPr>
               <a:t>أَنْ يُعِيدُوا التَّدْوِيرَ</a:t>
@@ -50666,6 +50841,7 @@
                   <a:srgbClr val="1F2A37"/>
                 </a:solidFill>
                 <a:latin typeface="Amiri" pitchFamily="2" charset="-78"/>
+                <a:ea typeface="Amiri" pitchFamily="2" charset="-78"/>
                 <a:cs typeface="Amiri" pitchFamily="2" charset="-78"/>
               </a:rPr>
               <a:t>مُفِيدَةٌ إِلَى حَدٍّ مَا، شَرِيطَةَ أَنْ تُطَبَّقَ بِمَسْؤُولِيَّةٍ.</a:t>
@@ -50767,6 +50943,7 @@
                   <a:srgbClr val="1F2A37"/>
                 </a:solidFill>
                 <a:latin typeface="Amiri" pitchFamily="2" charset="-78"/>
+                <a:ea typeface="Amiri" pitchFamily="2" charset="-78"/>
                 <a:cs typeface="Amiri" pitchFamily="2" charset="-78"/>
               </a:rPr>
               <a:t>مُفِيدَةٌ دَائِمًا دُونَ شُرُوطٍ.</a:t>
@@ -50868,6 +51045,7 @@
                   <a:srgbClr val="1F2A37"/>
                 </a:solidFill>
                 <a:latin typeface="Amiri" pitchFamily="2" charset="-78"/>
+                <a:ea typeface="Amiri" pitchFamily="2" charset="-78"/>
                 <a:cs typeface="Amiri" pitchFamily="2" charset="-78"/>
               </a:rPr>
               <a:t>غَيْرُ مُفِيدَةٍ لِأَنَّهَا تِقْنِيَّةٌ.</a:t>
@@ -51203,6 +51381,7 @@
                   <a:srgbClr val="D4AF37"/>
                 </a:solidFill>
                 <a:latin typeface="Amiri" pitchFamily="2" charset="-78"/>
+                <a:ea typeface="Amiri" pitchFamily="2" charset="-78"/>
                 <a:cs typeface="Amiri" pitchFamily="2" charset="-78"/>
               </a:rPr>
               <a:t>م</a:t>
@@ -51523,6 +51702,7 @@
                   <a:srgbClr val="8A6D1E"/>
                 </a:solidFill>
                 <a:latin typeface="Amiri" pitchFamily="2" charset="-78"/>
+                <a:ea typeface="Amiri" pitchFamily="2" charset="-78"/>
                 <a:cs typeface="Amiri" pitchFamily="2" charset="-78"/>
               </a:rPr>
               <a:t>الإِجَابَاتُ وَالتَّعْلِيلُ</a:t>
@@ -51709,6 +51889,7 @@
                   <a:srgbClr val="1B3B6F"/>
                 </a:solidFill>
                 <a:latin typeface="Amiri" pitchFamily="2" charset="-78"/>
+                <a:ea typeface="Amiri" pitchFamily="2" charset="-78"/>
                 <a:cs typeface="Amiri" pitchFamily="2" charset="-78"/>
               </a:rPr>
               <a:t>مَعَايِيرُ التَّصْحِيحِ</a:t>
@@ -52353,6 +52534,7 @@
                   <a:srgbClr val="1F2A37"/>
                 </a:solidFill>
                 <a:latin typeface="Amiri" pitchFamily="2" charset="-78"/>
+                <a:ea typeface="Amiri" pitchFamily="2" charset="-78"/>
                 <a:cs typeface="Amiri" pitchFamily="2" charset="-78"/>
               </a:rPr>
               <a:t>يَتَّسِمُ السَّاحِلُ بِمَنَاخٍ مُعْتَدِلٍ.</a:t>
@@ -52454,6 +52636,7 @@
                   <a:srgbClr val="9AA1AB"/>
                 </a:solidFill>
                 <a:latin typeface="Amiri" pitchFamily="2" charset="-78"/>
+                <a:ea typeface="Amiri" pitchFamily="2" charset="-78"/>
                 <a:cs typeface="Amiri" pitchFamily="2" charset="-78"/>
               </a:rPr>
               <a:t>يَتَّسِمُ السَّاحِلُ إِلَى مَنَاخٍ مُعْتَدِلٍ.</a:t>
@@ -52555,6 +52738,7 @@
                   <a:srgbClr val="9AA1AB"/>
                 </a:solidFill>
                 <a:latin typeface="Amiri" pitchFamily="2" charset="-78"/>
+                <a:ea typeface="Amiri" pitchFamily="2" charset="-78"/>
                 <a:cs typeface="Amiri" pitchFamily="2" charset="-78"/>
               </a:rPr>
               <a:t>يَتَّسِمُ السَّاحِلُ عَلَى مَنَاخٍ مُعْتَدِلٍ.</a:t>
@@ -52741,6 +52925,7 @@
                   <a:srgbClr val="1B3B6F"/>
                 </a:solidFill>
                 <a:latin typeface="Amiri" pitchFamily="2" charset="-78"/>
+                <a:ea typeface="Amiri" pitchFamily="2" charset="-78"/>
                 <a:cs typeface="Amiri" pitchFamily="2" charset="-78"/>
               </a:rPr>
               <a:t>إِلَى</a:t>
@@ -52855,6 +53040,7 @@
                   <a:srgbClr val="9AA1AB"/>
                 </a:solidFill>
                 <a:latin typeface="Amiri" pitchFamily="2" charset="-78"/>
+                <a:ea typeface="Amiri" pitchFamily="2" charset="-78"/>
                 <a:cs typeface="Amiri" pitchFamily="2" charset="-78"/>
               </a:rPr>
               <a:t>بِسَبَبِ</a:t>
@@ -52956,6 +53142,7 @@
                   <a:srgbClr val="9AA1AB"/>
                 </a:solidFill>
                 <a:latin typeface="Amiri" pitchFamily="2" charset="-78"/>
+                <a:ea typeface="Amiri" pitchFamily="2" charset="-78"/>
                 <a:cs typeface="Amiri" pitchFamily="2" charset="-78"/>
               </a:rPr>
               <a:t>مِمَّا</a:t>
@@ -53084,6 +53271,7 @@
                   <a:srgbClr val="1F2A37"/>
                 </a:solidFill>
                 <a:latin typeface="Amiri" pitchFamily="2" charset="-78"/>
+                <a:ea typeface="Amiri" pitchFamily="2" charset="-78"/>
                 <a:cs typeface="Amiri" pitchFamily="2" charset="-78"/>
               </a:rPr>
               <a:t>يُؤَدِّي</a:t>
@@ -53270,6 +53458,7 @@
                   <a:srgbClr val="1B3B6F"/>
                 </a:solidFill>
                 <a:latin typeface="Amiri" pitchFamily="2" charset="-78"/>
+                <a:ea typeface="Amiri" pitchFamily="2" charset="-78"/>
                 <a:cs typeface="Amiri" pitchFamily="2" charset="-78"/>
               </a:rPr>
               <a:t>أَنْ</a:t>
@@ -53384,6 +53573,7 @@
                   <a:srgbClr val="9AA1AB"/>
                 </a:solidFill>
                 <a:latin typeface="Amiri" pitchFamily="2" charset="-78"/>
+                <a:ea typeface="Amiri" pitchFamily="2" charset="-78"/>
                 <a:cs typeface="Amiri" pitchFamily="2" charset="-78"/>
               </a:rPr>
               <a:t>أَنْ يُعِيدُونَ التَّدْوِيرَ</a:t>
@@ -53485,6 +53675,7 @@
                   <a:srgbClr val="9AA1AB"/>
                 </a:solidFill>
                 <a:latin typeface="Amiri" pitchFamily="2" charset="-78"/>
+                <a:ea typeface="Amiri" pitchFamily="2" charset="-78"/>
                 <a:cs typeface="Amiri" pitchFamily="2" charset="-78"/>
               </a:rPr>
               <a:t>أَنْ يُعِيدُ التَّدْوِيرَ</a:t>
@@ -53613,6 +53804,7 @@
                   <a:srgbClr val="1F2A37"/>
                 </a:solidFill>
                 <a:latin typeface="Amiri" pitchFamily="2" charset="-78"/>
+                <a:ea typeface="Amiri" pitchFamily="2" charset="-78"/>
                 <a:cs typeface="Amiri" pitchFamily="2" charset="-78"/>
               </a:rPr>
               <a:t>أَنْ يُعِيدُوا التَّدْوِيرَ</a:t>
@@ -53914,6 +54106,7 @@
                   <a:srgbClr val="1F2A37"/>
                 </a:solidFill>
                 <a:latin typeface="Amiri" pitchFamily="2" charset="-78"/>
+                <a:ea typeface="Amiri" pitchFamily="2" charset="-78"/>
                 <a:cs typeface="Amiri" pitchFamily="2" charset="-78"/>
               </a:rPr>
               <a:t>مُفِيدَةٌ إِلَى حَدٍّ مَا، شَرِيطَةَ أَنْ تُطَبَّقَ بِمَسْؤُولِيَّةٍ.</a:t>
@@ -54015,6 +54208,7 @@
                   <a:srgbClr val="9AA1AB"/>
                 </a:solidFill>
                 <a:latin typeface="Amiri" pitchFamily="2" charset="-78"/>
+                <a:ea typeface="Amiri" pitchFamily="2" charset="-78"/>
                 <a:cs typeface="Amiri" pitchFamily="2" charset="-78"/>
               </a:rPr>
               <a:t>مُفِيدَةٌ دَائِمًا دُونَ شُرُوطٍ.</a:t>
@@ -54116,6 +54310,7 @@
                   <a:srgbClr val="9AA1AB"/>
                 </a:solidFill>
                 <a:latin typeface="Amiri" pitchFamily="2" charset="-78"/>
+                <a:ea typeface="Amiri" pitchFamily="2" charset="-78"/>
                 <a:cs typeface="Amiri" pitchFamily="2" charset="-78"/>
               </a:rPr>
               <a:t>غَيْرُ مُفِيدَةٍ لِأَنَّهَا تِقْنِيَّةٌ.</a:t>
@@ -54305,6 +54500,7 @@
                   <a:srgbClr val="1B3B6F"/>
                 </a:solidFill>
                 <a:latin typeface="Amiri" pitchFamily="2" charset="-78"/>
+                <a:ea typeface="Amiri" pitchFamily="2" charset="-78"/>
                 <a:cs typeface="Amiri" pitchFamily="2" charset="-78"/>
               </a:rPr>
               <a:t>المُطَابَقَةُ · حَرْفُ الجَرِّ · أَنْ / أَنَّ · الحُكْمُ المُتَوَازِنُ</a:t>
@@ -54438,6 +54634,7 @@
                   <a:srgbClr val="D4AF37"/>
                 </a:solidFill>
                 <a:latin typeface="Amiri" pitchFamily="2" charset="-78"/>
+                <a:ea typeface="Amiri" pitchFamily="2" charset="-78"/>
                 <a:cs typeface="Amiri" pitchFamily="2" charset="-78"/>
               </a:rPr>
               <a:t>م</a:t>
@@ -54758,6 +54955,7 @@
                   <a:srgbClr val="8A6D1E"/>
                 </a:solidFill>
                 <a:latin typeface="Amiri" pitchFamily="2" charset="-78"/>
+                <a:ea typeface="Amiri" pitchFamily="2" charset="-78"/>
                 <a:cs typeface="Amiri" pitchFamily="2" charset="-78"/>
               </a:rPr>
               <a:t>مُرَاجَعَةُ القَوَاعِدِ</a:t>
@@ -54933,6 +55131,7 @@
                   <a:srgbClr val="8A6D1E"/>
                 </a:solidFill>
                 <a:latin typeface="Amiri" pitchFamily="2" charset="-78"/>
+                <a:ea typeface="Amiri" pitchFamily="2" charset="-78"/>
                 <a:cs typeface="Amiri" pitchFamily="2" charset="-78"/>
               </a:rPr>
               <a:t>يَسُودُ · تَهُبُّ الرِّيَاحُ</a:t>
@@ -54971,6 +55170,7 @@
                   <a:srgbClr val="1B3B6F"/>
                 </a:solidFill>
                 <a:latin typeface="Amiri" pitchFamily="2" charset="-78"/>
+                <a:ea typeface="Amiri" pitchFamily="2" charset="-78"/>
                 <a:cs typeface="Amiri" pitchFamily="2" charset="-78"/>
               </a:rPr>
               <a:t>تَهُبُّ الرِّيَاحُ وَتَسْقُطُ الثُّلُوجُ.</a:t>
@@ -55211,6 +55411,7 @@
                   <a:srgbClr val="8A6D1E"/>
                 </a:solidFill>
                 <a:latin typeface="Amiri" pitchFamily="2" charset="-78"/>
+                <a:ea typeface="Amiri" pitchFamily="2" charset="-78"/>
                 <a:cs typeface="Amiri" pitchFamily="2" charset="-78"/>
               </a:rPr>
               <a:t>يُلَوَّثُ · يُؤَدِّي إِلَى</a:t>
@@ -55252,6 +55453,7 @@
                   <a:srgbClr val="1B3B6F"/>
                 </a:solidFill>
                 <a:latin typeface="Amiri" pitchFamily="2" charset="-78"/>
+                <a:ea typeface="Amiri" pitchFamily="2" charset="-78"/>
                 <a:cs typeface="Amiri" pitchFamily="2" charset="-78"/>
               </a:rPr>
               <a:t>يُلَوَّثُ الهَوَاءُ بِعَوَادِمِ السَّيَّارَاتِ.</a:t>
@@ -55492,6 +55694,7 @@
                   <a:srgbClr val="8A6D1E"/>
                 </a:solidFill>
                 <a:latin typeface="Amiri" pitchFamily="2" charset="-78"/>
+                <a:ea typeface="Amiri" pitchFamily="2" charset="-78"/>
                 <a:cs typeface="Amiri" pitchFamily="2" charset="-78"/>
               </a:rPr>
               <a:t>أَنْ / لَمْ · شَرِيطَةَ أَنْ</a:t>
@@ -55530,6 +55733,7 @@
                   <a:srgbClr val="1B3B6F"/>
                 </a:solidFill>
                 <a:latin typeface="Amiri" pitchFamily="2" charset="-78"/>
+                <a:ea typeface="Amiri" pitchFamily="2" charset="-78"/>
                 <a:cs typeface="Amiri" pitchFamily="2" charset="-78"/>
               </a:rPr>
               <a:t>يَنْبَغِي أَنْ نُقَلِّلَ النُّفَايَاتِ.</a:t>
@@ -55784,6 +55988,7 @@
                   <a:srgbClr val="1B3B6F"/>
                 </a:solidFill>
                 <a:latin typeface="Amiri" pitchFamily="2" charset="-78"/>
+                <a:ea typeface="Amiri" pitchFamily="2" charset="-78"/>
                 <a:cs typeface="Amiri" pitchFamily="2" charset="-78"/>
               </a:rPr>
               <a:t>يُشَارُ إِلَى أَنَّ المَنَاخَ يَتَغَيَّرُ.</a:t>
@@ -55863,6 +56068,7 @@
                   <a:srgbClr val="B83227"/>
                 </a:solidFill>
                 <a:latin typeface="Amiri" pitchFamily="2" charset="-78"/>
+                <a:ea typeface="Amiri" pitchFamily="2" charset="-78"/>
                 <a:cs typeface="Amiri" pitchFamily="2" charset="-78"/>
               </a:rPr>
               <a:t>يُشَارُ إِلَى أَنْ المَنَاخُ يَتَغَيَّرُ.</a:t>
@@ -56019,6 +56225,7 @@
                   <a:srgbClr val="D4AF37"/>
                 </a:solidFill>
                 <a:latin typeface="Amiri" pitchFamily="2" charset="-78"/>
+                <a:ea typeface="Amiri" pitchFamily="2" charset="-78"/>
                 <a:cs typeface="Amiri" pitchFamily="2" charset="-78"/>
               </a:rPr>
               <a:t>م</a:t>
@@ -56339,6 +56546,7 @@
                   <a:srgbClr val="8A6D1E"/>
                 </a:solidFill>
                 <a:latin typeface="Amiri" pitchFamily="2" charset="-78"/>
+                <a:ea typeface="Amiri" pitchFamily="2" charset="-78"/>
                 <a:cs typeface="Amiri" pitchFamily="2" charset="-78"/>
               </a:rPr>
               <a:t>خُطَّةُ التَّقْيِيمِ</a:t>
@@ -57473,6 +57681,7 @@
                   <a:srgbClr val="D4AF37"/>
                 </a:solidFill>
                 <a:latin typeface="Amiri" pitchFamily="2" charset="-78"/>
+                <a:ea typeface="Amiri" pitchFamily="2" charset="-78"/>
                 <a:cs typeface="Amiri" pitchFamily="2" charset="-78"/>
               </a:rPr>
               <a:t>م</a:t>
@@ -57793,6 +58002,7 @@
                   <a:srgbClr val="8A6D1E"/>
                 </a:solidFill>
                 <a:latin typeface="Amiri" pitchFamily="2" charset="-78"/>
+                <a:ea typeface="Amiri" pitchFamily="2" charset="-78"/>
                 <a:cs typeface="Amiri" pitchFamily="2" charset="-78"/>
               </a:rPr>
               <a:t>الاِسْتِمَاعُ</a:t>
@@ -59716,6 +59926,7 @@
                   <a:srgbClr val="D4AF37"/>
                 </a:solidFill>
                 <a:latin typeface="Amiri" pitchFamily="2" charset="-78"/>
+                <a:ea typeface="Amiri" pitchFamily="2" charset="-78"/>
                 <a:cs typeface="Amiri" pitchFamily="2" charset="-78"/>
               </a:rPr>
               <a:t>م</a:t>
@@ -60036,6 +60247,7 @@
                   <a:srgbClr val="8A6D1E"/>
                 </a:solidFill>
                 <a:latin typeface="Amiri" pitchFamily="2" charset="-78"/>
+                <a:ea typeface="Amiri" pitchFamily="2" charset="-78"/>
                 <a:cs typeface="Amiri" pitchFamily="2" charset="-78"/>
               </a:rPr>
               <a:t>الإِجَابَاتُ</a:t>
@@ -60577,6 +60789,7 @@
                   <a:srgbClr val="8A6D1E"/>
                 </a:solidFill>
                 <a:latin typeface="Amiri" pitchFamily="2" charset="-78"/>
+                <a:ea typeface="Amiri" pitchFamily="2" charset="-78"/>
                 <a:cs typeface="Amiri" pitchFamily="2" charset="-78"/>
               </a:rPr>
               <a:t>فِي دَاخِلِ بَعْضِ الدُّوَلِ العَرَبِيَّةِ</a:t>
@@ -61080,6 +61293,7 @@
                   <a:srgbClr val="8A6D1E"/>
                 </a:solidFill>
                 <a:latin typeface="Amiri" pitchFamily="2" charset="-78"/>
+                <a:ea typeface="Amiri" pitchFamily="2" charset="-78"/>
                 <a:cs typeface="Amiri" pitchFamily="2" charset="-78"/>
               </a:rPr>
               <a:t>فَتَرَاتِ الجَفَافِ أَصْبَحَتْ أَطْوَلَ</a:t>
@@ -61583,6 +61797,7 @@
                   <a:srgbClr val="8A6D1E"/>
                 </a:solidFill>
                 <a:latin typeface="Amiri" pitchFamily="2" charset="-78"/>
+                <a:ea typeface="Amiri" pitchFamily="2" charset="-78"/>
                 <a:cs typeface="Amiri" pitchFamily="2" charset="-78"/>
               </a:rPr>
               <a:t>يَزْدَادُ الضَّغْطُ عَلَى المِيَاهِ الجَوْفِيَّةِ</a:t>
@@ -62086,6 +62301,7 @@
                   <a:srgbClr val="8A6D1E"/>
                 </a:solidFill>
                 <a:latin typeface="Amiri" pitchFamily="2" charset="-78"/>
+                <a:ea typeface="Amiri" pitchFamily="2" charset="-78"/>
                 <a:cs typeface="Amiri" pitchFamily="2" charset="-78"/>
               </a:rPr>
               <a:t>إِعَادَةَ اسْتِخْدَامِ المِيَاهِ وَتَرْشِيدَ الاسْتِهْلَاكِ</a:t>
@@ -62184,13 +62400,9 @@
     <a:fontScheme name="Office">
       <a:majorFont>
         <a:latin typeface="Calibri Light" panose="020F0302020204030204"/>
-        <a:ea typeface=""/>
-        <a:cs typeface=""/>
-        <a:font script="Jpan" typeface="游ゴシック Light"/>
-        <a:font script="Hang" typeface="맑은 고딕"/>
-        <a:font script="Hans" typeface="等线 Light"/>
-        <a:font script="Hant" typeface="新細明體"/>
-        <a:font script="Arab" typeface="Times New Roman"/>
+        <a:ea typeface="Amiri" pitchFamily="2" charset="-78"/>
+        <a:cs typeface="Amiri" pitchFamily="2" charset="-78"/>
+        <a:font script="Arab" typeface="Amiri"/>
         <a:font script="Hebr" typeface="Times New Roman"/>
         <a:font script="Thai" typeface="Angsana New"/>
         <a:font script="Ethi" typeface="Nyala"/>
@@ -62236,13 +62448,9 @@
       </a:majorFont>
       <a:minorFont>
         <a:latin typeface="Calibri" panose="020F0502020204030204"/>
-        <a:ea typeface=""/>
-        <a:cs typeface=""/>
-        <a:font script="Jpan" typeface="游ゴシック"/>
-        <a:font script="Hang" typeface="맑은 고딕"/>
-        <a:font script="Hans" typeface="等线"/>
-        <a:font script="Hant" typeface="新細明體"/>
-        <a:font script="Arab" typeface="Arial"/>
+        <a:ea typeface="Amiri" pitchFamily="2" charset="-78"/>
+        <a:cs typeface="Amiri" pitchFamily="2" charset="-78"/>
+        <a:font script="Arab" typeface="Amiri"/>
         <a:font script="Hebr" typeface="Arial"/>
         <a:font script="Thai" typeface="Cordia New"/>
         <a:font script="Ethi" typeface="Nyala"/>
